--- a/Presentations/OpenCode.pptx
+++ b/Presentations/OpenCode.pptx
@@ -15,9 +15,11 @@
     <p:sldId id="263" r:id="rId9"/>
     <p:sldId id="264" r:id="rId10"/>
     <p:sldId id="265" r:id="rId11"/>
+    <p:sldId id="266" r:id="rId12"/>
+    <p:sldId id="267" r:id="rId13"/>
   </p:sldIdLst>
   <p:notesMasterIdLst>
-    <p:notesMasterId r:id="rId12"/>
+    <p:notesMasterId r:id="rId14"/>
   </p:notesMasterIdLst>
   <p:sldSz cx="12191695" cy="6858000"/>
   <p:notesSz cx="6858000" cy="12191695"/>
@@ -623,6 +625,182 @@
             <a:fld id="{F7021451-1387-4CA6-816F-3879F97B5CBC}" type="slidenum">
               <a:rPr lang="en-US"/>
               <a:t>10</a:t>
+            </a:fld>
+            <a:endParaRPr lang="en-US"/>
+          </a:p>
+        </p:txBody>
+      </p:sp>
+    </p:spTree>
+    <p:extLst>
+      <p:ext uri="{BB962C8B-B14F-4D97-AF65-F5344CB8AC3E}">
+        <p14:creationId xmlns:p14="http://schemas.microsoft.com/office/powerpoint/2010/main" val="1024086991"/>
+      </p:ext>
+    </p:extLst>
+  </p:cSld>
+  <p:clrMapOvr>
+    <a:masterClrMapping/>
+  </p:clrMapOvr>
+</p:notes>
+</file>
+
+<file path=ppt/notesSlides/notesSlide11.xml><?xml version="1.0" encoding="utf-8"?>
+<p:notes xmlns:a="http://schemas.openxmlformats.org/drawingml/2006/main" xmlns:r="http://schemas.openxmlformats.org/officeDocument/2006/relationships" xmlns:p="http://schemas.openxmlformats.org/presentationml/2006/main">
+  <p:cSld>
+    <p:spTree>
+      <p:nvGrpSpPr>
+        <p:cNvPr id="1" name=""/>
+        <p:cNvGrpSpPr/>
+        <p:nvPr/>
+      </p:nvGrpSpPr>
+      <p:grpSpPr>
+        <a:xfrm>
+          <a:off x="0" y="0"/>
+          <a:ext cx="0" cy="0"/>
+          <a:chOff x="0" y="0"/>
+          <a:chExt cx="0" cy="0"/>
+        </a:xfrm>
+      </p:grpSpPr>
+      <p:sp>
+        <p:nvSpPr>
+          <p:cNvPr id="2" name="Slide Image Placeholder 1"/>
+          <p:cNvSpPr>
+            <a:spLocks noGrp="1" noRot="1" noChangeAspect="1"/>
+          </p:cNvSpPr>
+          <p:nvPr>
+            <p:ph type="sldImg"/>
+          </p:nvPr>
+        </p:nvSpPr>
+        <p:spPr/>
+      </p:sp>
+      <p:sp>
+        <p:nvSpPr>
+          <p:cNvPr id="3" name="Notes Placeholder 2"/>
+          <p:cNvSpPr>
+            <a:spLocks noGrp="1"/>
+          </p:cNvSpPr>
+          <p:nvPr>
+            <p:ph type="body" idx="1"/>
+          </p:nvPr>
+        </p:nvSpPr>
+        <p:spPr/>
+        <p:txBody>
+          <a:bodyPr/>
+          <a:lstStyle/>
+          <a:p>
+            <a:r>
+              <a:rPr lang="en-US" dirty="0"/>
+              <a:t/>
+            </a:r>
+            <a:endParaRPr lang="en-US" dirty="0"/>
+          </a:p>
+        </p:txBody>
+      </p:sp>
+      <p:sp>
+        <p:nvSpPr>
+          <p:cNvPr id="4" name="Slide Number Placeholder 3"/>
+          <p:cNvSpPr>
+            <a:spLocks noGrp="1"/>
+          </p:cNvSpPr>
+          <p:nvPr>
+            <p:ph type="sldNum" sz="quarter" idx="10"/>
+          </p:nvPr>
+        </p:nvSpPr>
+        <p:spPr/>
+        <p:txBody>
+          <a:bodyPr/>
+          <a:lstStyle/>
+          <a:p>
+            <a:fld id="{F7021451-1387-4CA6-816F-3879F97B5CBC}" type="slidenum">
+              <a:rPr lang="en-US"/>
+              <a:t>11</a:t>
+            </a:fld>
+            <a:endParaRPr lang="en-US"/>
+          </a:p>
+        </p:txBody>
+      </p:sp>
+    </p:spTree>
+    <p:extLst>
+      <p:ext uri="{BB962C8B-B14F-4D97-AF65-F5344CB8AC3E}">
+        <p14:creationId xmlns:p14="http://schemas.microsoft.com/office/powerpoint/2010/main" val="1024086991"/>
+      </p:ext>
+    </p:extLst>
+  </p:cSld>
+  <p:clrMapOvr>
+    <a:masterClrMapping/>
+  </p:clrMapOvr>
+</p:notes>
+</file>
+
+<file path=ppt/notesSlides/notesSlide12.xml><?xml version="1.0" encoding="utf-8"?>
+<p:notes xmlns:a="http://schemas.openxmlformats.org/drawingml/2006/main" xmlns:r="http://schemas.openxmlformats.org/officeDocument/2006/relationships" xmlns:p="http://schemas.openxmlformats.org/presentationml/2006/main">
+  <p:cSld>
+    <p:spTree>
+      <p:nvGrpSpPr>
+        <p:cNvPr id="1" name=""/>
+        <p:cNvGrpSpPr/>
+        <p:nvPr/>
+      </p:nvGrpSpPr>
+      <p:grpSpPr>
+        <a:xfrm>
+          <a:off x="0" y="0"/>
+          <a:ext cx="0" cy="0"/>
+          <a:chOff x="0" y="0"/>
+          <a:chExt cx="0" cy="0"/>
+        </a:xfrm>
+      </p:grpSpPr>
+      <p:sp>
+        <p:nvSpPr>
+          <p:cNvPr id="2" name="Slide Image Placeholder 1"/>
+          <p:cNvSpPr>
+            <a:spLocks noGrp="1" noRot="1" noChangeAspect="1"/>
+          </p:cNvSpPr>
+          <p:nvPr>
+            <p:ph type="sldImg"/>
+          </p:nvPr>
+        </p:nvSpPr>
+        <p:spPr/>
+      </p:sp>
+      <p:sp>
+        <p:nvSpPr>
+          <p:cNvPr id="3" name="Notes Placeholder 2"/>
+          <p:cNvSpPr>
+            <a:spLocks noGrp="1"/>
+          </p:cNvSpPr>
+          <p:nvPr>
+            <p:ph type="body" idx="1"/>
+          </p:nvPr>
+        </p:nvSpPr>
+        <p:spPr/>
+        <p:txBody>
+          <a:bodyPr/>
+          <a:lstStyle/>
+          <a:p>
+            <a:r>
+              <a:rPr lang="en-US" dirty="0"/>
+              <a:t/>
+            </a:r>
+            <a:endParaRPr lang="en-US" dirty="0"/>
+          </a:p>
+        </p:txBody>
+      </p:sp>
+      <p:sp>
+        <p:nvSpPr>
+          <p:cNvPr id="4" name="Slide Number Placeholder 3"/>
+          <p:cNvSpPr>
+            <a:spLocks noGrp="1"/>
+          </p:cNvSpPr>
+          <p:nvPr>
+            <p:ph type="sldNum" sz="quarter" idx="10"/>
+          </p:nvPr>
+        </p:nvSpPr>
+        <p:spPr/>
+        <p:txBody>
+          <a:bodyPr/>
+          <a:lstStyle/>
+          <a:p>
+            <a:fld id="{F7021451-1387-4CA6-816F-3879F97B5CBC}" type="slidenum">
+              <a:rPr lang="en-US"/>
+              <a:t>12</a:t>
             </a:fld>
             <a:endParaRPr lang="en-US"/>
           </a:p>
@@ -2030,6 +2208,3420 @@
     <p:bg>
       <p:bgPr>
         <a:solidFill>
+          <a:srgbClr val="FFFFFF"/>
+        </a:solidFill>
+      </p:bgPr>
+    </p:bg>
+    <p:spTree>
+      <p:nvGrpSpPr>
+        <p:cNvPr id="1" name=""/>
+        <p:cNvGrpSpPr/>
+        <p:nvPr/>
+      </p:nvGrpSpPr>
+      <p:grpSpPr>
+        <a:xfrm>
+          <a:off x="0" y="0"/>
+          <a:ext cx="0" cy="0"/>
+          <a:chOff x="0" y="0"/>
+          <a:chExt cx="0" cy="0"/>
+        </a:xfrm>
+      </p:grpSpPr>
+      <p:sp>
+        <p:nvSpPr>
+          <p:cNvPr id="2" name="Shape 0"/>
+          <p:cNvSpPr/>
+          <p:nvPr/>
+        </p:nvSpPr>
+        <p:spPr>
+          <a:xfrm>
+            <a:off x="457200" y="420624"/>
+            <a:ext cx="109728" cy="475488"/>
+          </a:xfrm>
+          <a:prstGeom prst="rect">
+            <a:avLst/>
+          </a:prstGeom>
+          <a:solidFill>
+            <a:srgbClr val="F2A65A"/>
+          </a:solidFill>
+          <a:ln/>
+        </p:spPr>
+      </p:sp>
+      <p:sp>
+        <p:nvSpPr>
+          <p:cNvPr id="3" name="Text 1"/>
+          <p:cNvSpPr/>
+          <p:nvPr/>
+        </p:nvSpPr>
+        <p:spPr>
+          <a:xfrm>
+            <a:off x="658368" y="329184"/>
+            <a:ext cx="10972800" cy="640080"/>
+          </a:xfrm>
+          <a:prstGeom prst="rect">
+            <a:avLst/>
+          </a:prstGeom>
+          <a:noFill/>
+          <a:ln/>
+        </p:spPr>
+        <p:txBody>
+          <a:bodyPr wrap="square" rtlCol="0" anchor="ctr"/>
+          <a:lstStyle/>
+          <a:p>
+            <a:pPr algn="l" indent="0" marL="0">
+              <a:buNone/>
+            </a:pPr>
+            <a:r>
+              <a:rPr lang="en-US" sz="3000" b="1" dirty="0">
+                <a:solidFill>
+                  <a:srgbClr val="0B1F3A"/>
+                </a:solidFill>
+                <a:latin typeface="Georgia" pitchFamily="34" charset="0"/>
+                <a:ea typeface="Georgia" pitchFamily="34" charset="-122"/>
+                <a:cs typeface="Georgia" pitchFamily="34" charset="-120"/>
+              </a:rPr>
+              <a:t>The AI Research Team</a:t>
+            </a:r>
+            <a:endParaRPr lang="en-US" sz="3000" dirty="0"/>
+          </a:p>
+        </p:txBody>
+      </p:sp>
+      <p:sp>
+        <p:nvSpPr>
+          <p:cNvPr id="4" name="Text 2"/>
+          <p:cNvSpPr/>
+          <p:nvPr/>
+        </p:nvSpPr>
+        <p:spPr>
+          <a:xfrm>
+            <a:off x="676656" y="969264"/>
+            <a:ext cx="10972800" cy="329184"/>
+          </a:xfrm>
+          <a:prstGeom prst="rect">
+            <a:avLst/>
+          </a:prstGeom>
+          <a:noFill/>
+          <a:ln/>
+        </p:spPr>
+        <p:txBody>
+          <a:bodyPr wrap="square" rtlCol="0" anchor="ctr"/>
+          <a:lstStyle/>
+          <a:p>
+            <a:pPr algn="l" indent="0" marL="0">
+              <a:buNone/>
+            </a:pPr>
+            <a:r>
+              <a:rPr lang="en-US" sz="1450" i="1" dirty="0">
+                <a:solidFill>
+                  <a:srgbClr val="1C7293"/>
+                </a:solidFill>
+                <a:latin typeface="Calibri" pitchFamily="34" charset="0"/>
+                <a:ea typeface="Calibri" pitchFamily="34" charset="-122"/>
+                <a:cs typeface="Calibri" pitchFamily="34" charset="-120"/>
+              </a:rPr>
+              <a:t>A whole computational-research lab, built as OpenCode agents</a:t>
+            </a:r>
+            <a:endParaRPr lang="en-US" sz="1450" dirty="0"/>
+          </a:p>
+        </p:txBody>
+      </p:sp>
+      <p:sp>
+        <p:nvSpPr>
+          <p:cNvPr id="5" name="Shape 3"/>
+          <p:cNvSpPr/>
+          <p:nvPr/>
+        </p:nvSpPr>
+        <p:spPr>
+          <a:xfrm>
+            <a:off x="457200" y="1463040"/>
+            <a:ext cx="11274552" cy="841248"/>
+          </a:xfrm>
+          <a:prstGeom prst="roundRect">
+            <a:avLst>
+              <a:gd name="adj" fmla="val 6522"/>
+            </a:avLst>
+          </a:prstGeom>
+          <a:solidFill>
+            <a:srgbClr val="0B1F3A"/>
+          </a:solidFill>
+          <a:ln/>
+        </p:spPr>
+      </p:sp>
+      <p:sp>
+        <p:nvSpPr>
+          <p:cNvPr id="6" name="Text 4"/>
+          <p:cNvSpPr/>
+          <p:nvPr/>
+        </p:nvSpPr>
+        <p:spPr>
+          <a:xfrm>
+            <a:off x="731520" y="1572768"/>
+            <a:ext cx="10698480" cy="365760"/>
+          </a:xfrm>
+          <a:prstGeom prst="rect">
+            <a:avLst/>
+          </a:prstGeom>
+          <a:noFill/>
+          <a:ln/>
+        </p:spPr>
+        <p:txBody>
+          <a:bodyPr wrap="square" rtlCol="0" anchor="ctr"/>
+          <a:lstStyle/>
+          <a:p>
+            <a:pPr algn="l" indent="0" marL="0">
+              <a:buNone/>
+            </a:pPr>
+            <a:r>
+              <a:rPr lang="en-US" sz="1600" b="1" dirty="0">
+                <a:solidFill>
+                  <a:srgbClr val="F2A65A"/>
+                </a:solidFill>
+                <a:latin typeface="Consolas" pitchFamily="34" charset="0"/>
+                <a:ea typeface="Consolas" pitchFamily="34" charset="-122"/>
+                <a:cs typeface="Consolas" pitchFamily="34" charset="-120"/>
+              </a:rPr>
+              <a:t>lab-pi</a:t>
+            </a:r>
+            <a:pPr algn="l" indent="0" marL="0">
+              <a:buNone/>
+            </a:pPr>
+            <a:r>
+              <a:rPr lang="en-US" sz="1600" b="1" dirty="0">
+                <a:solidFill>
+                  <a:srgbClr val="FFFFFF"/>
+                </a:solidFill>
+                <a:latin typeface="Georgia" pitchFamily="34" charset="0"/>
+                <a:ea typeface="Georgia" pitchFamily="34" charset="-122"/>
+                <a:cs typeface="Georgia" pitchFamily="34" charset="-120"/>
+              </a:rPr>
+              <a:t>   Primary orchestrator</a:t>
+            </a:r>
+            <a:endParaRPr lang="en-US" sz="1600" dirty="0"/>
+          </a:p>
+        </p:txBody>
+      </p:sp>
+      <p:sp>
+        <p:nvSpPr>
+          <p:cNvPr id="7" name="Text 5"/>
+          <p:cNvSpPr/>
+          <p:nvPr/>
+        </p:nvSpPr>
+        <p:spPr>
+          <a:xfrm>
+            <a:off x="731520" y="1901952"/>
+            <a:ext cx="10789920" cy="365760"/>
+          </a:xfrm>
+          <a:prstGeom prst="rect">
+            <a:avLst/>
+          </a:prstGeom>
+          <a:noFill/>
+          <a:ln/>
+        </p:spPr>
+        <p:txBody>
+          <a:bodyPr wrap="square" rtlCol="0" anchor="ctr"/>
+          <a:lstStyle/>
+          <a:p>
+            <a:pPr algn="l" indent="0" marL="0">
+              <a:buNone/>
+            </a:pPr>
+            <a:r>
+              <a:rPr lang="en-US" sz="1200" dirty="0">
+                <a:solidFill>
+                  <a:srgbClr val="9FD0E0"/>
+                </a:solidFill>
+                <a:latin typeface="Consolas" pitchFamily="34" charset="0"/>
+                <a:ea typeface="Consolas" pitchFamily="34" charset="-122"/>
+                <a:cs typeface="Consolas" pitchFamily="34" charset="-120"/>
+              </a:rPr>
+              <a:t>einfra/agentic</a:t>
+            </a:r>
+            <a:pPr algn="l" indent="0" marL="0">
+              <a:buNone/>
+            </a:pPr>
+            <a:r>
+              <a:rPr lang="en-US" sz="1200" dirty="0">
+                <a:solidFill>
+                  <a:srgbClr val="C9D4E0"/>
+                </a:solidFill>
+                <a:latin typeface="Calibri" pitchFamily="34" charset="0"/>
+                <a:ea typeface="Calibri" pitchFamily="34" charset="-122"/>
+                <a:cs typeface="Calibri" pitchFamily="34" charset="-120"/>
+              </a:rPr>
+              <a:t>  —  scopes the question, delegates to specialists, requires a critic verdict, and records every decision. Never fills gaps itself.</a:t>
+            </a:r>
+            <a:endParaRPr lang="en-US" sz="1200" dirty="0"/>
+          </a:p>
+        </p:txBody>
+      </p:sp>
+      <p:sp>
+        <p:nvSpPr>
+          <p:cNvPr id="8" name="Shape 6"/>
+          <p:cNvSpPr/>
+          <p:nvPr/>
+        </p:nvSpPr>
+        <p:spPr>
+          <a:xfrm>
+            <a:off x="457200" y="2487168"/>
+            <a:ext cx="5486400" cy="2788920"/>
+          </a:xfrm>
+          <a:prstGeom prst="roundRect">
+            <a:avLst>
+              <a:gd name="adj" fmla="val 1639"/>
+            </a:avLst>
+          </a:prstGeom>
+          <a:solidFill>
+            <a:srgbClr val="E8EEF4"/>
+          </a:solidFill>
+          <a:ln w="12700">
+            <a:solidFill>
+              <a:srgbClr val="C9D4E0"/>
+            </a:solidFill>
+            <a:prstDash val="solid"/>
+          </a:ln>
+        </p:spPr>
+      </p:sp>
+      <p:sp>
+        <p:nvSpPr>
+          <p:cNvPr id="9" name="Shape 7"/>
+          <p:cNvSpPr/>
+          <p:nvPr/>
+        </p:nvSpPr>
+        <p:spPr>
+          <a:xfrm>
+            <a:off x="457200" y="2487168"/>
+            <a:ext cx="5486400" cy="82296"/>
+          </a:xfrm>
+          <a:prstGeom prst="rect">
+            <a:avLst/>
+          </a:prstGeom>
+          <a:solidFill>
+            <a:srgbClr val="1C7293"/>
+          </a:solidFill>
+          <a:ln/>
+        </p:spPr>
+      </p:sp>
+      <p:sp>
+        <p:nvSpPr>
+          <p:cNvPr id="10" name="Text 8"/>
+          <p:cNvSpPr/>
+          <p:nvPr/>
+        </p:nvSpPr>
+        <p:spPr>
+          <a:xfrm>
+            <a:off x="658368" y="2651760"/>
+            <a:ext cx="5120640" cy="347472"/>
+          </a:xfrm>
+          <a:prstGeom prst="rect">
+            <a:avLst/>
+          </a:prstGeom>
+          <a:noFill/>
+          <a:ln/>
+        </p:spPr>
+        <p:txBody>
+          <a:bodyPr wrap="square" rtlCol="0" anchor="ctr"/>
+          <a:lstStyle/>
+          <a:p>
+            <a:pPr indent="0" marL="0">
+              <a:buNone/>
+            </a:pPr>
+            <a:r>
+              <a:rPr lang="en-US" sz="1550" b="1" dirty="0">
+                <a:solidFill>
+                  <a:srgbClr val="0B1F3A"/>
+                </a:solidFill>
+                <a:latin typeface="Georgia" pitchFamily="34" charset="0"/>
+                <a:ea typeface="Georgia" pitchFamily="34" charset="-122"/>
+                <a:cs typeface="Georgia" pitchFamily="34" charset="-120"/>
+              </a:rPr>
+              <a:t>Specialists — the doers</a:t>
+            </a:r>
+            <a:endParaRPr lang="en-US" sz="1550" dirty="0"/>
+          </a:p>
+        </p:txBody>
+      </p:sp>
+      <p:sp>
+        <p:nvSpPr>
+          <p:cNvPr id="11" name="Text 9"/>
+          <p:cNvSpPr/>
+          <p:nvPr/>
+        </p:nvSpPr>
+        <p:spPr>
+          <a:xfrm>
+            <a:off x="658368" y="3044952"/>
+            <a:ext cx="3291840" cy="292608"/>
+          </a:xfrm>
+          <a:prstGeom prst="rect">
+            <a:avLst/>
+          </a:prstGeom>
+          <a:noFill/>
+          <a:ln/>
+        </p:spPr>
+        <p:txBody>
+          <a:bodyPr wrap="square" rtlCol="0" anchor="ctr"/>
+          <a:lstStyle/>
+          <a:p>
+            <a:pPr algn="l" indent="0" marL="0">
+              <a:buNone/>
+            </a:pPr>
+            <a:r>
+              <a:rPr lang="en-US" sz="1150" b="1" dirty="0">
+                <a:solidFill>
+                  <a:srgbClr val="15486E"/>
+                </a:solidFill>
+                <a:latin typeface="Consolas" pitchFamily="34" charset="0"/>
+                <a:ea typeface="Consolas" pitchFamily="34" charset="-122"/>
+                <a:cs typeface="Consolas" pitchFamily="34" charset="-120"/>
+              </a:rPr>
+              <a:t>research-specialist</a:t>
+            </a:r>
+            <a:endParaRPr lang="en-US" sz="1150" dirty="0"/>
+          </a:p>
+        </p:txBody>
+      </p:sp>
+      <p:sp>
+        <p:nvSpPr>
+          <p:cNvPr id="12" name="Text 10"/>
+          <p:cNvSpPr/>
+          <p:nvPr/>
+        </p:nvSpPr>
+        <p:spPr>
+          <a:xfrm>
+            <a:off x="3931920" y="3044952"/>
+            <a:ext cx="1920240" cy="292608"/>
+          </a:xfrm>
+          <a:prstGeom prst="rect">
+            <a:avLst/>
+          </a:prstGeom>
+          <a:noFill/>
+          <a:ln/>
+        </p:spPr>
+        <p:txBody>
+          <a:bodyPr wrap="square" rtlCol="0" anchor="ctr"/>
+          <a:lstStyle/>
+          <a:p>
+            <a:pPr algn="r" indent="0" marL="0">
+              <a:buNone/>
+            </a:pPr>
+            <a:r>
+              <a:rPr lang="en-US" sz="1050" dirty="0">
+                <a:solidFill>
+                  <a:srgbClr val="7A8AA0"/>
+                </a:solidFill>
+                <a:latin typeface="Consolas" pitchFamily="34" charset="0"/>
+                <a:ea typeface="Consolas" pitchFamily="34" charset="-122"/>
+                <a:cs typeface="Consolas" pitchFamily="34" charset="-120"/>
+              </a:rPr>
+              <a:t>kimi-k2.6</a:t>
+            </a:r>
+            <a:endParaRPr lang="en-US" sz="1050" dirty="0"/>
+          </a:p>
+        </p:txBody>
+      </p:sp>
+      <p:sp>
+        <p:nvSpPr>
+          <p:cNvPr id="13" name="Text 11"/>
+          <p:cNvSpPr/>
+          <p:nvPr/>
+        </p:nvSpPr>
+        <p:spPr>
+          <a:xfrm>
+            <a:off x="658368" y="3351276"/>
+            <a:ext cx="3291840" cy="292608"/>
+          </a:xfrm>
+          <a:prstGeom prst="rect">
+            <a:avLst/>
+          </a:prstGeom>
+          <a:noFill/>
+          <a:ln/>
+        </p:spPr>
+        <p:txBody>
+          <a:bodyPr wrap="square" rtlCol="0" anchor="ctr"/>
+          <a:lstStyle/>
+          <a:p>
+            <a:pPr algn="l" indent="0" marL="0">
+              <a:buNone/>
+            </a:pPr>
+            <a:r>
+              <a:rPr lang="en-US" sz="1150" b="1" dirty="0">
+                <a:solidFill>
+                  <a:srgbClr val="15486E"/>
+                </a:solidFill>
+                <a:latin typeface="Consolas" pitchFamily="34" charset="0"/>
+                <a:ea typeface="Consolas" pitchFamily="34" charset="-122"/>
+                <a:cs typeface="Consolas" pitchFamily="34" charset="-120"/>
+              </a:rPr>
+              <a:t>methods-reviewer</a:t>
+            </a:r>
+            <a:endParaRPr lang="en-US" sz="1150" dirty="0"/>
+          </a:p>
+        </p:txBody>
+      </p:sp>
+      <p:sp>
+        <p:nvSpPr>
+          <p:cNvPr id="14" name="Text 12"/>
+          <p:cNvSpPr/>
+          <p:nvPr/>
+        </p:nvSpPr>
+        <p:spPr>
+          <a:xfrm>
+            <a:off x="3931920" y="3351276"/>
+            <a:ext cx="1920240" cy="292608"/>
+          </a:xfrm>
+          <a:prstGeom prst="rect">
+            <a:avLst/>
+          </a:prstGeom>
+          <a:noFill/>
+          <a:ln/>
+        </p:spPr>
+        <p:txBody>
+          <a:bodyPr wrap="square" rtlCol="0" anchor="ctr"/>
+          <a:lstStyle/>
+          <a:p>
+            <a:pPr algn="r" indent="0" marL="0">
+              <a:buNone/>
+            </a:pPr>
+            <a:r>
+              <a:rPr lang="en-US" sz="1050" dirty="0">
+                <a:solidFill>
+                  <a:srgbClr val="7A8AA0"/>
+                </a:solidFill>
+                <a:latin typeface="Consolas" pitchFamily="34" charset="0"/>
+                <a:ea typeface="Consolas" pitchFamily="34" charset="-122"/>
+                <a:cs typeface="Consolas" pitchFamily="34" charset="-120"/>
+              </a:rPr>
+              <a:t>kimi-k2.6</a:t>
+            </a:r>
+            <a:endParaRPr lang="en-US" sz="1050" dirty="0"/>
+          </a:p>
+        </p:txBody>
+      </p:sp>
+      <p:sp>
+        <p:nvSpPr>
+          <p:cNvPr id="15" name="Text 13"/>
+          <p:cNvSpPr/>
+          <p:nvPr/>
+        </p:nvSpPr>
+        <p:spPr>
+          <a:xfrm>
+            <a:off x="658368" y="3657600"/>
+            <a:ext cx="3291840" cy="292608"/>
+          </a:xfrm>
+          <a:prstGeom prst="rect">
+            <a:avLst/>
+          </a:prstGeom>
+          <a:noFill/>
+          <a:ln/>
+        </p:spPr>
+        <p:txBody>
+          <a:bodyPr wrap="square" rtlCol="0" anchor="ctr"/>
+          <a:lstStyle/>
+          <a:p>
+            <a:pPr algn="l" indent="0" marL="0">
+              <a:buNone/>
+            </a:pPr>
+            <a:r>
+              <a:rPr lang="en-US" sz="1150" b="1" dirty="0">
+                <a:solidFill>
+                  <a:srgbClr val="15486E"/>
+                </a:solidFill>
+                <a:latin typeface="Consolas" pitchFamily="34" charset="0"/>
+                <a:ea typeface="Consolas" pitchFamily="34" charset="-122"/>
+                <a:cs typeface="Consolas" pitchFamily="34" charset="-120"/>
+              </a:rPr>
+              <a:t>programmer</a:t>
+            </a:r>
+            <a:endParaRPr lang="en-US" sz="1150" dirty="0"/>
+          </a:p>
+        </p:txBody>
+      </p:sp>
+      <p:sp>
+        <p:nvSpPr>
+          <p:cNvPr id="16" name="Text 14"/>
+          <p:cNvSpPr/>
+          <p:nvPr/>
+        </p:nvSpPr>
+        <p:spPr>
+          <a:xfrm>
+            <a:off x="3931920" y="3657600"/>
+            <a:ext cx="1920240" cy="292608"/>
+          </a:xfrm>
+          <a:prstGeom prst="rect">
+            <a:avLst/>
+          </a:prstGeom>
+          <a:noFill/>
+          <a:ln/>
+        </p:spPr>
+        <p:txBody>
+          <a:bodyPr wrap="square" rtlCol="0" anchor="ctr"/>
+          <a:lstStyle/>
+          <a:p>
+            <a:pPr algn="r" indent="0" marL="0">
+              <a:buNone/>
+            </a:pPr>
+            <a:r>
+              <a:rPr lang="en-US" sz="1050" dirty="0">
+                <a:solidFill>
+                  <a:srgbClr val="7A8AA0"/>
+                </a:solidFill>
+                <a:latin typeface="Consolas" pitchFamily="34" charset="0"/>
+                <a:ea typeface="Consolas" pitchFamily="34" charset="-122"/>
+                <a:cs typeface="Consolas" pitchFamily="34" charset="-120"/>
+              </a:rPr>
+              <a:t>qwen3-coder</a:t>
+            </a:r>
+            <a:endParaRPr lang="en-US" sz="1050" dirty="0"/>
+          </a:p>
+        </p:txBody>
+      </p:sp>
+      <p:sp>
+        <p:nvSpPr>
+          <p:cNvPr id="17" name="Text 15"/>
+          <p:cNvSpPr/>
+          <p:nvPr/>
+        </p:nvSpPr>
+        <p:spPr>
+          <a:xfrm>
+            <a:off x="658368" y="3963924"/>
+            <a:ext cx="3291840" cy="292608"/>
+          </a:xfrm>
+          <a:prstGeom prst="rect">
+            <a:avLst/>
+          </a:prstGeom>
+          <a:noFill/>
+          <a:ln/>
+        </p:spPr>
+        <p:txBody>
+          <a:bodyPr wrap="square" rtlCol="0" anchor="ctr"/>
+          <a:lstStyle/>
+          <a:p>
+            <a:pPr algn="l" indent="0" marL="0">
+              <a:buNone/>
+            </a:pPr>
+            <a:r>
+              <a:rPr lang="en-US" sz="1150" b="1" dirty="0">
+                <a:solidFill>
+                  <a:srgbClr val="15486E"/>
+                </a:solidFill>
+                <a:latin typeface="Consolas" pitchFamily="34" charset="0"/>
+                <a:ea typeface="Consolas" pitchFamily="34" charset="-122"/>
+                <a:cs typeface="Consolas" pitchFamily="34" charset="-120"/>
+              </a:rPr>
+              <a:t>data-analyst</a:t>
+            </a:r>
+            <a:endParaRPr lang="en-US" sz="1150" dirty="0"/>
+          </a:p>
+        </p:txBody>
+      </p:sp>
+      <p:sp>
+        <p:nvSpPr>
+          <p:cNvPr id="18" name="Text 16"/>
+          <p:cNvSpPr/>
+          <p:nvPr/>
+        </p:nvSpPr>
+        <p:spPr>
+          <a:xfrm>
+            <a:off x="3931920" y="3963924"/>
+            <a:ext cx="1920240" cy="292608"/>
+          </a:xfrm>
+          <a:prstGeom prst="rect">
+            <a:avLst/>
+          </a:prstGeom>
+          <a:noFill/>
+          <a:ln/>
+        </p:spPr>
+        <p:txBody>
+          <a:bodyPr wrap="square" rtlCol="0" anchor="ctr"/>
+          <a:lstStyle/>
+          <a:p>
+            <a:pPr algn="r" indent="0" marL="0">
+              <a:buNone/>
+            </a:pPr>
+            <a:r>
+              <a:rPr lang="en-US" sz="1050" dirty="0">
+                <a:solidFill>
+                  <a:srgbClr val="7A8AA0"/>
+                </a:solidFill>
+                <a:latin typeface="Consolas" pitchFamily="34" charset="0"/>
+                <a:ea typeface="Consolas" pitchFamily="34" charset="-122"/>
+                <a:cs typeface="Consolas" pitchFamily="34" charset="-120"/>
+              </a:rPr>
+              <a:t>kimi-k2.6</a:t>
+            </a:r>
+            <a:endParaRPr lang="en-US" sz="1050" dirty="0"/>
+          </a:p>
+        </p:txBody>
+      </p:sp>
+      <p:sp>
+        <p:nvSpPr>
+          <p:cNvPr id="19" name="Text 17"/>
+          <p:cNvSpPr/>
+          <p:nvPr/>
+        </p:nvSpPr>
+        <p:spPr>
+          <a:xfrm>
+            <a:off x="658368" y="4270248"/>
+            <a:ext cx="3291840" cy="292608"/>
+          </a:xfrm>
+          <a:prstGeom prst="rect">
+            <a:avLst/>
+          </a:prstGeom>
+          <a:noFill/>
+          <a:ln/>
+        </p:spPr>
+        <p:txBody>
+          <a:bodyPr wrap="square" rtlCol="0" anchor="ctr"/>
+          <a:lstStyle/>
+          <a:p>
+            <a:pPr algn="l" indent="0" marL="0">
+              <a:buNone/>
+            </a:pPr>
+            <a:r>
+              <a:rPr lang="en-US" sz="1150" b="1" dirty="0">
+                <a:solidFill>
+                  <a:srgbClr val="15486E"/>
+                </a:solidFill>
+                <a:latin typeface="Consolas" pitchFamily="34" charset="0"/>
+                <a:ea typeface="Consolas" pitchFamily="34" charset="-122"/>
+                <a:cs typeface="Consolas" pitchFamily="34" charset="-120"/>
+              </a:rPr>
+              <a:t>hpc-operator</a:t>
+            </a:r>
+            <a:endParaRPr lang="en-US" sz="1150" dirty="0"/>
+          </a:p>
+        </p:txBody>
+      </p:sp>
+      <p:sp>
+        <p:nvSpPr>
+          <p:cNvPr id="20" name="Text 18"/>
+          <p:cNvSpPr/>
+          <p:nvPr/>
+        </p:nvSpPr>
+        <p:spPr>
+          <a:xfrm>
+            <a:off x="3931920" y="4270248"/>
+            <a:ext cx="1920240" cy="292608"/>
+          </a:xfrm>
+          <a:prstGeom prst="rect">
+            <a:avLst/>
+          </a:prstGeom>
+          <a:noFill/>
+          <a:ln/>
+        </p:spPr>
+        <p:txBody>
+          <a:bodyPr wrap="square" rtlCol="0" anchor="ctr"/>
+          <a:lstStyle/>
+          <a:p>
+            <a:pPr algn="r" indent="0" marL="0">
+              <a:buNone/>
+            </a:pPr>
+            <a:r>
+              <a:rPr lang="en-US" sz="1050" dirty="0">
+                <a:solidFill>
+                  <a:srgbClr val="7A8AA0"/>
+                </a:solidFill>
+                <a:latin typeface="Consolas" pitchFamily="34" charset="0"/>
+                <a:ea typeface="Consolas" pitchFamily="34" charset="-122"/>
+                <a:cs typeface="Consolas" pitchFamily="34" charset="-120"/>
+              </a:rPr>
+              <a:t>glm-5.1 · MCP only</a:t>
+            </a:r>
+            <a:endParaRPr lang="en-US" sz="1050" dirty="0"/>
+          </a:p>
+        </p:txBody>
+      </p:sp>
+      <p:sp>
+        <p:nvSpPr>
+          <p:cNvPr id="21" name="Text 19"/>
+          <p:cNvSpPr/>
+          <p:nvPr/>
+        </p:nvSpPr>
+        <p:spPr>
+          <a:xfrm>
+            <a:off x="658368" y="4576572"/>
+            <a:ext cx="3291840" cy="292608"/>
+          </a:xfrm>
+          <a:prstGeom prst="rect">
+            <a:avLst/>
+          </a:prstGeom>
+          <a:noFill/>
+          <a:ln/>
+        </p:spPr>
+        <p:txBody>
+          <a:bodyPr wrap="square" rtlCol="0" anchor="ctr"/>
+          <a:lstStyle/>
+          <a:p>
+            <a:pPr algn="l" indent="0" marL="0">
+              <a:buNone/>
+            </a:pPr>
+            <a:r>
+              <a:rPr lang="en-US" sz="1150" b="1" dirty="0">
+                <a:solidFill>
+                  <a:srgbClr val="15486E"/>
+                </a:solidFill>
+                <a:latin typeface="Consolas" pitchFamily="34" charset="0"/>
+                <a:ea typeface="Consolas" pitchFamily="34" charset="-122"/>
+                <a:cs typeface="Consolas" pitchFamily="34" charset="-120"/>
+              </a:rPr>
+              <a:t>reproducibility-officer</a:t>
+            </a:r>
+            <a:endParaRPr lang="en-US" sz="1150" dirty="0"/>
+          </a:p>
+        </p:txBody>
+      </p:sp>
+      <p:sp>
+        <p:nvSpPr>
+          <p:cNvPr id="22" name="Text 20"/>
+          <p:cNvSpPr/>
+          <p:nvPr/>
+        </p:nvSpPr>
+        <p:spPr>
+          <a:xfrm>
+            <a:off x="3931920" y="4576572"/>
+            <a:ext cx="1920240" cy="292608"/>
+          </a:xfrm>
+          <a:prstGeom prst="rect">
+            <a:avLst/>
+          </a:prstGeom>
+          <a:noFill/>
+          <a:ln/>
+        </p:spPr>
+        <p:txBody>
+          <a:bodyPr wrap="square" rtlCol="0" anchor="ctr"/>
+          <a:lstStyle/>
+          <a:p>
+            <a:pPr algn="r" indent="0" marL="0">
+              <a:buNone/>
+            </a:pPr>
+            <a:r>
+              <a:rPr lang="en-US" sz="1050" dirty="0">
+                <a:solidFill>
+                  <a:srgbClr val="7A8AA0"/>
+                </a:solidFill>
+                <a:latin typeface="Consolas" pitchFamily="34" charset="0"/>
+                <a:ea typeface="Consolas" pitchFamily="34" charset="-122"/>
+                <a:cs typeface="Consolas" pitchFamily="34" charset="-120"/>
+              </a:rPr>
+              <a:t>kimi-k2.6</a:t>
+            </a:r>
+            <a:endParaRPr lang="en-US" sz="1050" dirty="0"/>
+          </a:p>
+        </p:txBody>
+      </p:sp>
+      <p:sp>
+        <p:nvSpPr>
+          <p:cNvPr id="23" name="Text 21"/>
+          <p:cNvSpPr/>
+          <p:nvPr/>
+        </p:nvSpPr>
+        <p:spPr>
+          <a:xfrm>
+            <a:off x="658368" y="4882896"/>
+            <a:ext cx="3291840" cy="292608"/>
+          </a:xfrm>
+          <a:prstGeom prst="rect">
+            <a:avLst/>
+          </a:prstGeom>
+          <a:noFill/>
+          <a:ln/>
+        </p:spPr>
+        <p:txBody>
+          <a:bodyPr wrap="square" rtlCol="0" anchor="ctr"/>
+          <a:lstStyle/>
+          <a:p>
+            <a:pPr algn="l" indent="0" marL="0">
+              <a:buNone/>
+            </a:pPr>
+            <a:r>
+              <a:rPr lang="en-US" sz="1150" b="1" dirty="0">
+                <a:solidFill>
+                  <a:srgbClr val="15486E"/>
+                </a:solidFill>
+                <a:latin typeface="Consolas" pitchFamily="34" charset="0"/>
+                <a:ea typeface="Consolas" pitchFamily="34" charset="-122"/>
+                <a:cs typeface="Consolas" pitchFamily="34" charset="-120"/>
+              </a:rPr>
+              <a:t>scientific-writer</a:t>
+            </a:r>
+            <a:endParaRPr lang="en-US" sz="1150" dirty="0"/>
+          </a:p>
+        </p:txBody>
+      </p:sp>
+      <p:sp>
+        <p:nvSpPr>
+          <p:cNvPr id="24" name="Text 22"/>
+          <p:cNvSpPr/>
+          <p:nvPr/>
+        </p:nvSpPr>
+        <p:spPr>
+          <a:xfrm>
+            <a:off x="3931920" y="4882896"/>
+            <a:ext cx="1920240" cy="292608"/>
+          </a:xfrm>
+          <a:prstGeom prst="rect">
+            <a:avLst/>
+          </a:prstGeom>
+          <a:noFill/>
+          <a:ln/>
+        </p:spPr>
+        <p:txBody>
+          <a:bodyPr wrap="square" rtlCol="0" anchor="ctr"/>
+          <a:lstStyle/>
+          <a:p>
+            <a:pPr algn="r" indent="0" marL="0">
+              <a:buNone/>
+            </a:pPr>
+            <a:r>
+              <a:rPr lang="en-US" sz="1050" dirty="0">
+                <a:solidFill>
+                  <a:srgbClr val="7A8AA0"/>
+                </a:solidFill>
+                <a:latin typeface="Consolas" pitchFamily="34" charset="0"/>
+                <a:ea typeface="Consolas" pitchFamily="34" charset="-122"/>
+                <a:cs typeface="Consolas" pitchFamily="34" charset="-120"/>
+              </a:rPr>
+              <a:t>kimi-k2.6</a:t>
+            </a:r>
+            <a:endParaRPr lang="en-US" sz="1050" dirty="0"/>
+          </a:p>
+        </p:txBody>
+      </p:sp>
+      <p:sp>
+        <p:nvSpPr>
+          <p:cNvPr id="25" name="Shape 23"/>
+          <p:cNvSpPr/>
+          <p:nvPr/>
+        </p:nvSpPr>
+        <p:spPr>
+          <a:xfrm>
+            <a:off x="6245352" y="2487168"/>
+            <a:ext cx="5486400" cy="2788920"/>
+          </a:xfrm>
+          <a:prstGeom prst="roundRect">
+            <a:avLst>
+              <a:gd name="adj" fmla="val 1639"/>
+            </a:avLst>
+          </a:prstGeom>
+          <a:solidFill>
+            <a:srgbClr val="E8EEF4"/>
+          </a:solidFill>
+          <a:ln w="12700">
+            <a:solidFill>
+              <a:srgbClr val="C9D4E0"/>
+            </a:solidFill>
+            <a:prstDash val="solid"/>
+          </a:ln>
+        </p:spPr>
+      </p:sp>
+      <p:sp>
+        <p:nvSpPr>
+          <p:cNvPr id="26" name="Shape 24"/>
+          <p:cNvSpPr/>
+          <p:nvPr/>
+        </p:nvSpPr>
+        <p:spPr>
+          <a:xfrm>
+            <a:off x="6245352" y="2487168"/>
+            <a:ext cx="5486400" cy="82296"/>
+          </a:xfrm>
+          <a:prstGeom prst="rect">
+            <a:avLst/>
+          </a:prstGeom>
+          <a:solidFill>
+            <a:srgbClr val="F2A65A"/>
+          </a:solidFill>
+          <a:ln/>
+        </p:spPr>
+      </p:sp>
+      <p:sp>
+        <p:nvSpPr>
+          <p:cNvPr id="27" name="Text 25"/>
+          <p:cNvSpPr/>
+          <p:nvPr/>
+        </p:nvSpPr>
+        <p:spPr>
+          <a:xfrm>
+            <a:off x="6446520" y="2651760"/>
+            <a:ext cx="5120640" cy="347472"/>
+          </a:xfrm>
+          <a:prstGeom prst="rect">
+            <a:avLst/>
+          </a:prstGeom>
+          <a:noFill/>
+          <a:ln/>
+        </p:spPr>
+        <p:txBody>
+          <a:bodyPr wrap="square" rtlCol="0" anchor="ctr"/>
+          <a:lstStyle/>
+          <a:p>
+            <a:pPr indent="0" marL="0">
+              <a:buNone/>
+            </a:pPr>
+            <a:r>
+              <a:rPr lang="en-US" sz="1550" b="1" dirty="0">
+                <a:solidFill>
+                  <a:srgbClr val="0B1F3A"/>
+                </a:solidFill>
+                <a:latin typeface="Georgia" pitchFamily="34" charset="0"/>
+                <a:ea typeface="Georgia" pitchFamily="34" charset="-122"/>
+                <a:cs typeface="Georgia" pitchFamily="34" charset="-120"/>
+              </a:rPr>
+              <a:t>Critics — the gate</a:t>
+            </a:r>
+            <a:endParaRPr lang="en-US" sz="1550" dirty="0"/>
+          </a:p>
+        </p:txBody>
+      </p:sp>
+      <p:sp>
+        <p:nvSpPr>
+          <p:cNvPr id="28" name="Text 26"/>
+          <p:cNvSpPr/>
+          <p:nvPr/>
+        </p:nvSpPr>
+        <p:spPr>
+          <a:xfrm>
+            <a:off x="6446520" y="3044952"/>
+            <a:ext cx="3474720" cy="292608"/>
+          </a:xfrm>
+          <a:prstGeom prst="rect">
+            <a:avLst/>
+          </a:prstGeom>
+          <a:noFill/>
+          <a:ln/>
+        </p:spPr>
+        <p:txBody>
+          <a:bodyPr wrap="square" rtlCol="0" anchor="ctr"/>
+          <a:lstStyle/>
+          <a:p>
+            <a:pPr algn="l" indent="0" marL="0">
+              <a:buNone/>
+            </a:pPr>
+            <a:r>
+              <a:rPr lang="en-US" sz="1150" b="1" dirty="0">
+                <a:solidFill>
+                  <a:srgbClr val="B5532A"/>
+                </a:solidFill>
+                <a:latin typeface="Consolas" pitchFamily="34" charset="0"/>
+                <a:ea typeface="Consolas" pitchFamily="34" charset="-122"/>
+                <a:cs typeface="Consolas" pitchFamily="34" charset="-120"/>
+              </a:rPr>
+              <a:t>research-critic</a:t>
+            </a:r>
+            <a:endParaRPr lang="en-US" sz="1150" dirty="0"/>
+          </a:p>
+        </p:txBody>
+      </p:sp>
+      <p:sp>
+        <p:nvSpPr>
+          <p:cNvPr id="29" name="Text 27"/>
+          <p:cNvSpPr/>
+          <p:nvPr/>
+        </p:nvSpPr>
+        <p:spPr>
+          <a:xfrm>
+            <a:off x="9784080" y="3044952"/>
+            <a:ext cx="1783080" cy="292608"/>
+          </a:xfrm>
+          <a:prstGeom prst="rect">
+            <a:avLst/>
+          </a:prstGeom>
+          <a:noFill/>
+          <a:ln/>
+        </p:spPr>
+        <p:txBody>
+          <a:bodyPr wrap="square" rtlCol="0" anchor="ctr"/>
+          <a:lstStyle/>
+          <a:p>
+            <a:pPr algn="r" indent="0" marL="0">
+              <a:buNone/>
+            </a:pPr>
+            <a:r>
+              <a:rPr lang="en-US" sz="1050" dirty="0">
+                <a:solidFill>
+                  <a:srgbClr val="7A8AA0"/>
+                </a:solidFill>
+                <a:latin typeface="Consolas" pitchFamily="34" charset="0"/>
+                <a:ea typeface="Consolas" pitchFamily="34" charset="-122"/>
+                <a:cs typeface="Consolas" pitchFamily="34" charset="-120"/>
+              </a:rPr>
+              <a:t>thinker</a:t>
+            </a:r>
+            <a:endParaRPr lang="en-US" sz="1050" dirty="0"/>
+          </a:p>
+        </p:txBody>
+      </p:sp>
+      <p:sp>
+        <p:nvSpPr>
+          <p:cNvPr id="30" name="Text 28"/>
+          <p:cNvSpPr/>
+          <p:nvPr/>
+        </p:nvSpPr>
+        <p:spPr>
+          <a:xfrm>
+            <a:off x="6446520" y="3351276"/>
+            <a:ext cx="3474720" cy="292608"/>
+          </a:xfrm>
+          <a:prstGeom prst="rect">
+            <a:avLst/>
+          </a:prstGeom>
+          <a:noFill/>
+          <a:ln/>
+        </p:spPr>
+        <p:txBody>
+          <a:bodyPr wrap="square" rtlCol="0" anchor="ctr"/>
+          <a:lstStyle/>
+          <a:p>
+            <a:pPr algn="l" indent="0" marL="0">
+              <a:buNone/>
+            </a:pPr>
+            <a:r>
+              <a:rPr lang="en-US" sz="1150" b="1" dirty="0">
+                <a:solidFill>
+                  <a:srgbClr val="B5532A"/>
+                </a:solidFill>
+                <a:latin typeface="Consolas" pitchFamily="34" charset="0"/>
+                <a:ea typeface="Consolas" pitchFamily="34" charset="-122"/>
+                <a:cs typeface="Consolas" pitchFamily="34" charset="-120"/>
+              </a:rPr>
+              <a:t>methods-critic</a:t>
+            </a:r>
+            <a:endParaRPr lang="en-US" sz="1150" dirty="0"/>
+          </a:p>
+        </p:txBody>
+      </p:sp>
+      <p:sp>
+        <p:nvSpPr>
+          <p:cNvPr id="31" name="Text 29"/>
+          <p:cNvSpPr/>
+          <p:nvPr/>
+        </p:nvSpPr>
+        <p:spPr>
+          <a:xfrm>
+            <a:off x="9784080" y="3351276"/>
+            <a:ext cx="1783080" cy="292608"/>
+          </a:xfrm>
+          <a:prstGeom prst="rect">
+            <a:avLst/>
+          </a:prstGeom>
+          <a:noFill/>
+          <a:ln/>
+        </p:spPr>
+        <p:txBody>
+          <a:bodyPr wrap="square" rtlCol="0" anchor="ctr"/>
+          <a:lstStyle/>
+          <a:p>
+            <a:pPr algn="r" indent="0" marL="0">
+              <a:buNone/>
+            </a:pPr>
+            <a:r>
+              <a:rPr lang="en-US" sz="1050" dirty="0">
+                <a:solidFill>
+                  <a:srgbClr val="7A8AA0"/>
+                </a:solidFill>
+                <a:latin typeface="Consolas" pitchFamily="34" charset="0"/>
+                <a:ea typeface="Consolas" pitchFamily="34" charset="-122"/>
+                <a:cs typeface="Consolas" pitchFamily="34" charset="-120"/>
+              </a:rPr>
+              <a:t>thinker</a:t>
+            </a:r>
+            <a:endParaRPr lang="en-US" sz="1050" dirty="0"/>
+          </a:p>
+        </p:txBody>
+      </p:sp>
+      <p:sp>
+        <p:nvSpPr>
+          <p:cNvPr id="32" name="Text 30"/>
+          <p:cNvSpPr/>
+          <p:nvPr/>
+        </p:nvSpPr>
+        <p:spPr>
+          <a:xfrm>
+            <a:off x="6446520" y="3657600"/>
+            <a:ext cx="3474720" cy="292608"/>
+          </a:xfrm>
+          <a:prstGeom prst="rect">
+            <a:avLst/>
+          </a:prstGeom>
+          <a:noFill/>
+          <a:ln/>
+        </p:spPr>
+        <p:txBody>
+          <a:bodyPr wrap="square" rtlCol="0" anchor="ctr"/>
+          <a:lstStyle/>
+          <a:p>
+            <a:pPr algn="l" indent="0" marL="0">
+              <a:buNone/>
+            </a:pPr>
+            <a:r>
+              <a:rPr lang="en-US" sz="1150" b="1" dirty="0">
+                <a:solidFill>
+                  <a:srgbClr val="B5532A"/>
+                </a:solidFill>
+                <a:latin typeface="Consolas" pitchFamily="34" charset="0"/>
+                <a:ea typeface="Consolas" pitchFamily="34" charset="-122"/>
+                <a:cs typeface="Consolas" pitchFamily="34" charset="-120"/>
+              </a:rPr>
+              <a:t>code-critic</a:t>
+            </a:r>
+            <a:endParaRPr lang="en-US" sz="1150" dirty="0"/>
+          </a:p>
+        </p:txBody>
+      </p:sp>
+      <p:sp>
+        <p:nvSpPr>
+          <p:cNvPr id="33" name="Text 31"/>
+          <p:cNvSpPr/>
+          <p:nvPr/>
+        </p:nvSpPr>
+        <p:spPr>
+          <a:xfrm>
+            <a:off x="9784080" y="3657600"/>
+            <a:ext cx="1783080" cy="292608"/>
+          </a:xfrm>
+          <a:prstGeom prst="rect">
+            <a:avLst/>
+          </a:prstGeom>
+          <a:noFill/>
+          <a:ln/>
+        </p:spPr>
+        <p:txBody>
+          <a:bodyPr wrap="square" rtlCol="0" anchor="ctr"/>
+          <a:lstStyle/>
+          <a:p>
+            <a:pPr algn="r" indent="0" marL="0">
+              <a:buNone/>
+            </a:pPr>
+            <a:r>
+              <a:rPr lang="en-US" sz="1050" dirty="0">
+                <a:solidFill>
+                  <a:srgbClr val="7A8AA0"/>
+                </a:solidFill>
+                <a:latin typeface="Consolas" pitchFamily="34" charset="0"/>
+                <a:ea typeface="Consolas" pitchFamily="34" charset="-122"/>
+                <a:cs typeface="Consolas" pitchFamily="34" charset="-120"/>
+              </a:rPr>
+              <a:t>thinker</a:t>
+            </a:r>
+            <a:endParaRPr lang="en-US" sz="1050" dirty="0"/>
+          </a:p>
+        </p:txBody>
+      </p:sp>
+      <p:sp>
+        <p:nvSpPr>
+          <p:cNvPr id="34" name="Text 32"/>
+          <p:cNvSpPr/>
+          <p:nvPr/>
+        </p:nvSpPr>
+        <p:spPr>
+          <a:xfrm>
+            <a:off x="6446520" y="3963924"/>
+            <a:ext cx="3474720" cy="292608"/>
+          </a:xfrm>
+          <a:prstGeom prst="rect">
+            <a:avLst/>
+          </a:prstGeom>
+          <a:noFill/>
+          <a:ln/>
+        </p:spPr>
+        <p:txBody>
+          <a:bodyPr wrap="square" rtlCol="0" anchor="ctr"/>
+          <a:lstStyle/>
+          <a:p>
+            <a:pPr algn="l" indent="0" marL="0">
+              <a:buNone/>
+            </a:pPr>
+            <a:r>
+              <a:rPr lang="en-US" sz="1150" b="1" dirty="0">
+                <a:solidFill>
+                  <a:srgbClr val="B5532A"/>
+                </a:solidFill>
+                <a:latin typeface="Consolas" pitchFamily="34" charset="0"/>
+                <a:ea typeface="Consolas" pitchFamily="34" charset="-122"/>
+                <a:cs typeface="Consolas" pitchFamily="34" charset="-120"/>
+              </a:rPr>
+              <a:t>hpc-safety-critic</a:t>
+            </a:r>
+            <a:endParaRPr lang="en-US" sz="1150" dirty="0"/>
+          </a:p>
+        </p:txBody>
+      </p:sp>
+      <p:sp>
+        <p:nvSpPr>
+          <p:cNvPr id="35" name="Text 33"/>
+          <p:cNvSpPr/>
+          <p:nvPr/>
+        </p:nvSpPr>
+        <p:spPr>
+          <a:xfrm>
+            <a:off x="9784080" y="3963924"/>
+            <a:ext cx="1783080" cy="292608"/>
+          </a:xfrm>
+          <a:prstGeom prst="rect">
+            <a:avLst/>
+          </a:prstGeom>
+          <a:noFill/>
+          <a:ln/>
+        </p:spPr>
+        <p:txBody>
+          <a:bodyPr wrap="square" rtlCol="0" anchor="ctr"/>
+          <a:lstStyle/>
+          <a:p>
+            <a:pPr algn="r" indent="0" marL="0">
+              <a:buNone/>
+            </a:pPr>
+            <a:r>
+              <a:rPr lang="en-US" sz="1050" dirty="0">
+                <a:solidFill>
+                  <a:srgbClr val="7A8AA0"/>
+                </a:solidFill>
+                <a:latin typeface="Consolas" pitchFamily="34" charset="0"/>
+                <a:ea typeface="Consolas" pitchFamily="34" charset="-122"/>
+                <a:cs typeface="Consolas" pitchFamily="34" charset="-120"/>
+              </a:rPr>
+              <a:t>thinker</a:t>
+            </a:r>
+            <a:endParaRPr lang="en-US" sz="1050" dirty="0"/>
+          </a:p>
+        </p:txBody>
+      </p:sp>
+      <p:sp>
+        <p:nvSpPr>
+          <p:cNvPr id="36" name="Text 34"/>
+          <p:cNvSpPr/>
+          <p:nvPr/>
+        </p:nvSpPr>
+        <p:spPr>
+          <a:xfrm>
+            <a:off x="6446520" y="4270248"/>
+            <a:ext cx="3474720" cy="292608"/>
+          </a:xfrm>
+          <a:prstGeom prst="rect">
+            <a:avLst/>
+          </a:prstGeom>
+          <a:noFill/>
+          <a:ln/>
+        </p:spPr>
+        <p:txBody>
+          <a:bodyPr wrap="square" rtlCol="0" anchor="ctr"/>
+          <a:lstStyle/>
+          <a:p>
+            <a:pPr algn="l" indent="0" marL="0">
+              <a:buNone/>
+            </a:pPr>
+            <a:r>
+              <a:rPr lang="en-US" sz="1150" b="1" dirty="0">
+                <a:solidFill>
+                  <a:srgbClr val="B5532A"/>
+                </a:solidFill>
+                <a:latin typeface="Consolas" pitchFamily="34" charset="0"/>
+                <a:ea typeface="Consolas" pitchFamily="34" charset="-122"/>
+                <a:cs typeface="Consolas" pitchFamily="34" charset="-120"/>
+              </a:rPr>
+              <a:t>reproducibility-critic</a:t>
+            </a:r>
+            <a:endParaRPr lang="en-US" sz="1150" dirty="0"/>
+          </a:p>
+        </p:txBody>
+      </p:sp>
+      <p:sp>
+        <p:nvSpPr>
+          <p:cNvPr id="37" name="Text 35"/>
+          <p:cNvSpPr/>
+          <p:nvPr/>
+        </p:nvSpPr>
+        <p:spPr>
+          <a:xfrm>
+            <a:off x="9784080" y="4270248"/>
+            <a:ext cx="1783080" cy="292608"/>
+          </a:xfrm>
+          <a:prstGeom prst="rect">
+            <a:avLst/>
+          </a:prstGeom>
+          <a:noFill/>
+          <a:ln/>
+        </p:spPr>
+        <p:txBody>
+          <a:bodyPr wrap="square" rtlCol="0" anchor="ctr"/>
+          <a:lstStyle/>
+          <a:p>
+            <a:pPr algn="r" indent="0" marL="0">
+              <a:buNone/>
+            </a:pPr>
+            <a:r>
+              <a:rPr lang="en-US" sz="1050" dirty="0">
+                <a:solidFill>
+                  <a:srgbClr val="7A8AA0"/>
+                </a:solidFill>
+                <a:latin typeface="Consolas" pitchFamily="34" charset="0"/>
+                <a:ea typeface="Consolas" pitchFamily="34" charset="-122"/>
+                <a:cs typeface="Consolas" pitchFamily="34" charset="-120"/>
+              </a:rPr>
+              <a:t>thinker</a:t>
+            </a:r>
+            <a:endParaRPr lang="en-US" sz="1050" dirty="0"/>
+          </a:p>
+        </p:txBody>
+      </p:sp>
+      <p:sp>
+        <p:nvSpPr>
+          <p:cNvPr id="38" name="Text 36"/>
+          <p:cNvSpPr/>
+          <p:nvPr/>
+        </p:nvSpPr>
+        <p:spPr>
+          <a:xfrm>
+            <a:off x="6446520" y="4645152"/>
+            <a:ext cx="5120640" cy="548640"/>
+          </a:xfrm>
+          <a:prstGeom prst="rect">
+            <a:avLst/>
+          </a:prstGeom>
+          <a:noFill/>
+          <a:ln/>
+        </p:spPr>
+        <p:txBody>
+          <a:bodyPr wrap="square" rtlCol="0" anchor="t"/>
+          <a:lstStyle/>
+          <a:p>
+            <a:pPr algn="l" indent="0" marL="0">
+              <a:lnSpc>
+                <a:spcPct val="105000"/>
+              </a:lnSpc>
+              <a:buNone/>
+            </a:pPr>
+            <a:r>
+              <a:rPr lang="en-US" sz="1150" dirty="0">
+                <a:solidFill>
+                  <a:srgbClr val="3C4A5A"/>
+                </a:solidFill>
+                <a:latin typeface="Calibri" pitchFamily="34" charset="0"/>
+                <a:ea typeface="Calibri" pitchFamily="34" charset="-122"/>
+                <a:cs typeface="Calibri" pitchFamily="34" charset="-120"/>
+              </a:rPr>
+              <a:t>Each writes an explicit </a:t>
+            </a:r>
+            <a:pPr algn="l" indent="0" marL="0">
+              <a:lnSpc>
+                <a:spcPct val="105000"/>
+              </a:lnSpc>
+              <a:buNone/>
+            </a:pPr>
+            <a:r>
+              <a:rPr lang="en-US" sz="1150" b="1" dirty="0">
+                <a:solidFill>
+                  <a:srgbClr val="0B1F3A"/>
+                </a:solidFill>
+                <a:latin typeface="Calibri" pitchFamily="34" charset="0"/>
+                <a:ea typeface="Calibri" pitchFamily="34" charset="-122"/>
+                <a:cs typeface="Calibri" pitchFamily="34" charset="-120"/>
+              </a:rPr>
+              <a:t>accept / revise / reject</a:t>
+            </a:r>
+            <a:pPr algn="l" indent="0" marL="0">
+              <a:lnSpc>
+                <a:spcPct val="105000"/>
+              </a:lnSpc>
+              <a:buNone/>
+            </a:pPr>
+            <a:r>
+              <a:rPr lang="en-US" sz="1150" dirty="0">
+                <a:solidFill>
+                  <a:srgbClr val="3C4A5A"/>
+                </a:solidFill>
+                <a:latin typeface="Calibri" pitchFamily="34" charset="0"/>
+                <a:ea typeface="Calibri" pitchFamily="34" charset="-122"/>
+                <a:cs typeface="Calibri" pitchFamily="34" charset="-120"/>
+              </a:rPr>
+              <a:t> verdict before the PI accepts.</a:t>
+            </a:r>
+            <a:endParaRPr lang="en-US" sz="1150" dirty="0"/>
+          </a:p>
+        </p:txBody>
+      </p:sp>
+      <p:sp>
+        <p:nvSpPr>
+          <p:cNvPr id="39" name="Shape 37"/>
+          <p:cNvSpPr/>
+          <p:nvPr/>
+        </p:nvSpPr>
+        <p:spPr>
+          <a:xfrm>
+            <a:off x="457200" y="5440680"/>
+            <a:ext cx="11274552" cy="502920"/>
+          </a:xfrm>
+          <a:prstGeom prst="rect">
+            <a:avLst/>
+          </a:prstGeom>
+          <a:solidFill>
+            <a:srgbClr val="0B1F3A"/>
+          </a:solidFill>
+          <a:ln/>
+        </p:spPr>
+      </p:sp>
+      <p:sp>
+        <p:nvSpPr>
+          <p:cNvPr id="40" name="Text 38"/>
+          <p:cNvSpPr/>
+          <p:nvPr/>
+        </p:nvSpPr>
+        <p:spPr>
+          <a:xfrm>
+            <a:off x="640080" y="5440680"/>
+            <a:ext cx="10972800" cy="502920"/>
+          </a:xfrm>
+          <a:prstGeom prst="rect">
+            <a:avLst/>
+          </a:prstGeom>
+          <a:noFill/>
+          <a:ln/>
+        </p:spPr>
+        <p:txBody>
+          <a:bodyPr wrap="square" rtlCol="0" anchor="ctr"/>
+          <a:lstStyle/>
+          <a:p>
+            <a:pPr algn="l" indent="0" marL="0">
+              <a:buNone/>
+            </a:pPr>
+            <a:r>
+              <a:rPr lang="en-US" sz="1200" b="1" dirty="0">
+                <a:solidFill>
+                  <a:srgbClr val="F2A65A"/>
+                </a:solidFill>
+                <a:latin typeface="Calibri" pitchFamily="34" charset="0"/>
+                <a:ea typeface="Calibri" pitchFamily="34" charset="-122"/>
+                <a:cs typeface="Calibri" pitchFamily="34" charset="-120"/>
+              </a:rPr>
+              <a:t>→  </a:t>
+            </a:r>
+            <a:pPr algn="l" indent="0" marL="0">
+              <a:buNone/>
+            </a:pPr>
+            <a:r>
+              <a:rPr lang="en-US" sz="1200" dirty="0">
+                <a:solidFill>
+                  <a:srgbClr val="FFFFFF"/>
+                </a:solidFill>
+                <a:latin typeface="Calibri" pitchFamily="34" charset="0"/>
+                <a:ea typeface="Calibri" pitchFamily="34" charset="-122"/>
+                <a:cs typeface="Calibri" pitchFamily="34" charset="-120"/>
+              </a:rPr>
+              <a:t>It ties the whole talk together: e-INFRA models · subagents via the Task tool · Chimera HPC via MCP · least-privilege permissions per role.</a:t>
+            </a:r>
+            <a:endParaRPr lang="en-US" sz="1200" dirty="0"/>
+          </a:p>
+        </p:txBody>
+      </p:sp>
+      <p:sp>
+        <p:nvSpPr>
+          <p:cNvPr id="41" name="Shape 39"/>
+          <p:cNvSpPr/>
+          <p:nvPr/>
+        </p:nvSpPr>
+        <p:spPr>
+          <a:xfrm>
+            <a:off x="0" y="6473952"/>
+            <a:ext cx="12191695" cy="384048"/>
+          </a:xfrm>
+          <a:prstGeom prst="rect">
+            <a:avLst/>
+          </a:prstGeom>
+          <a:solidFill>
+            <a:srgbClr val="0B1F3A"/>
+          </a:solidFill>
+          <a:ln/>
+        </p:spPr>
+      </p:sp>
+      <p:sp>
+        <p:nvSpPr>
+          <p:cNvPr id="42" name="Text 40"/>
+          <p:cNvSpPr/>
+          <p:nvPr/>
+        </p:nvSpPr>
+        <p:spPr>
+          <a:xfrm>
+            <a:off x="457200" y="6473952"/>
+            <a:ext cx="8229600" cy="384048"/>
+          </a:xfrm>
+          <a:prstGeom prst="rect">
+            <a:avLst/>
+          </a:prstGeom>
+          <a:noFill/>
+          <a:ln/>
+        </p:spPr>
+        <p:txBody>
+          <a:bodyPr wrap="square" rtlCol="0" anchor="ctr"/>
+          <a:lstStyle/>
+          <a:p>
+            <a:pPr algn="l" indent="0" marL="0">
+              <a:buNone/>
+            </a:pPr>
+            <a:r>
+              <a:rPr lang="en-US" sz="950" dirty="0">
+                <a:solidFill>
+                  <a:srgbClr val="AEBED0"/>
+                </a:solidFill>
+                <a:latin typeface="Calibri" pitchFamily="34" charset="0"/>
+                <a:ea typeface="Calibri" pitchFamily="34" charset="-122"/>
+                <a:cs typeface="Calibri" pitchFamily="34" charset="-120"/>
+              </a:rPr>
+              <a:t>OpenCode — AI coding agents in your terminal</a:t>
+            </a:r>
+            <a:endParaRPr lang="en-US" sz="950" dirty="0"/>
+          </a:p>
+        </p:txBody>
+      </p:sp>
+      <p:sp>
+        <p:nvSpPr>
+          <p:cNvPr id="43" name="Text 41"/>
+          <p:cNvSpPr/>
+          <p:nvPr/>
+        </p:nvSpPr>
+        <p:spPr>
+          <a:xfrm>
+            <a:off x="10332720" y="6473952"/>
+            <a:ext cx="1399032" cy="384048"/>
+          </a:xfrm>
+          <a:prstGeom prst="rect">
+            <a:avLst/>
+          </a:prstGeom>
+          <a:noFill/>
+          <a:ln/>
+        </p:spPr>
+        <p:txBody>
+          <a:bodyPr wrap="square" rtlCol="0" anchor="ctr"/>
+          <a:lstStyle/>
+          <a:p>
+            <a:pPr algn="r" indent="0" marL="0">
+              <a:buNone/>
+            </a:pPr>
+            <a:r>
+              <a:rPr lang="en-US" sz="950" dirty="0">
+                <a:solidFill>
+                  <a:srgbClr val="AEBED0"/>
+                </a:solidFill>
+                <a:latin typeface="Calibri" pitchFamily="34" charset="0"/>
+                <a:ea typeface="Calibri" pitchFamily="34" charset="-122"/>
+                <a:cs typeface="Calibri" pitchFamily="34" charset="-120"/>
+              </a:rPr>
+              <a:t>10 / 12</a:t>
+            </a:r>
+            <a:endParaRPr lang="en-US" sz="950" dirty="0"/>
+          </a:p>
+        </p:txBody>
+      </p:sp>
+    </p:spTree>
+  </p:cSld>
+  <p:clrMapOvr>
+    <a:masterClrMapping/>
+  </p:clrMapOvr>
+</p:sld>
+</file>
+
+<file path=ppt/slides/slide11.xml><?xml version="1.0" encoding="utf-8"?>
+<p:sld xmlns:a="http://schemas.openxmlformats.org/drawingml/2006/main" xmlns:r="http://schemas.openxmlformats.org/officeDocument/2006/relationships" xmlns:p="http://schemas.openxmlformats.org/presentationml/2006/main">
+  <p:cSld name="Slide 11">
+    <p:bg>
+      <p:bgPr>
+        <a:solidFill>
+          <a:srgbClr val="FFFFFF"/>
+        </a:solidFill>
+      </p:bgPr>
+    </p:bg>
+    <p:spTree>
+      <p:nvGrpSpPr>
+        <p:cNvPr id="1" name=""/>
+        <p:cNvGrpSpPr/>
+        <p:nvPr/>
+      </p:nvGrpSpPr>
+      <p:grpSpPr>
+        <a:xfrm>
+          <a:off x="0" y="0"/>
+          <a:ext cx="0" cy="0"/>
+          <a:chOff x="0" y="0"/>
+          <a:chExt cx="0" cy="0"/>
+        </a:xfrm>
+      </p:grpSpPr>
+      <p:sp>
+        <p:nvSpPr>
+          <p:cNvPr id="2" name="Shape 0"/>
+          <p:cNvSpPr/>
+          <p:nvPr/>
+        </p:nvSpPr>
+        <p:spPr>
+          <a:xfrm>
+            <a:off x="457200" y="420624"/>
+            <a:ext cx="109728" cy="475488"/>
+          </a:xfrm>
+          <a:prstGeom prst="rect">
+            <a:avLst/>
+          </a:prstGeom>
+          <a:solidFill>
+            <a:srgbClr val="F2A65A"/>
+          </a:solidFill>
+          <a:ln/>
+        </p:spPr>
+      </p:sp>
+      <p:sp>
+        <p:nvSpPr>
+          <p:cNvPr id="3" name="Text 1"/>
+          <p:cNvSpPr/>
+          <p:nvPr/>
+        </p:nvSpPr>
+        <p:spPr>
+          <a:xfrm>
+            <a:off x="658368" y="329184"/>
+            <a:ext cx="10972800" cy="640080"/>
+          </a:xfrm>
+          <a:prstGeom prst="rect">
+            <a:avLst/>
+          </a:prstGeom>
+          <a:noFill/>
+          <a:ln/>
+        </p:spPr>
+        <p:txBody>
+          <a:bodyPr wrap="square" rtlCol="0" anchor="ctr"/>
+          <a:lstStyle/>
+          <a:p>
+            <a:pPr algn="l" indent="0" marL="0">
+              <a:buNone/>
+            </a:pPr>
+            <a:r>
+              <a:rPr lang="en-US" sz="3000" b="1" dirty="0">
+                <a:solidFill>
+                  <a:srgbClr val="0B1F3A"/>
+                </a:solidFill>
+                <a:latin typeface="Georgia" pitchFamily="34" charset="0"/>
+                <a:ea typeface="Georgia" pitchFamily="34" charset="-122"/>
+                <a:cs typeface="Georgia" pitchFamily="34" charset="-120"/>
+              </a:rPr>
+              <a:t>How It Runs — The Critique Gate</a:t>
+            </a:r>
+            <a:endParaRPr lang="en-US" sz="3000" dirty="0"/>
+          </a:p>
+        </p:txBody>
+      </p:sp>
+      <p:sp>
+        <p:nvSpPr>
+          <p:cNvPr id="4" name="Text 2"/>
+          <p:cNvSpPr/>
+          <p:nvPr/>
+        </p:nvSpPr>
+        <p:spPr>
+          <a:xfrm>
+            <a:off x="676656" y="969264"/>
+            <a:ext cx="10972800" cy="329184"/>
+          </a:xfrm>
+          <a:prstGeom prst="rect">
+            <a:avLst/>
+          </a:prstGeom>
+          <a:noFill/>
+          <a:ln/>
+        </p:spPr>
+        <p:txBody>
+          <a:bodyPr wrap="square" rtlCol="0" anchor="ctr"/>
+          <a:lstStyle/>
+          <a:p>
+            <a:pPr algn="l" indent="0" marL="0">
+              <a:buNone/>
+            </a:pPr>
+            <a:r>
+              <a:rPr lang="en-US" sz="1450" i="1" dirty="0">
+                <a:solidFill>
+                  <a:srgbClr val="1C7293"/>
+                </a:solidFill>
+                <a:latin typeface="Calibri" pitchFamily="34" charset="0"/>
+                <a:ea typeface="Calibri" pitchFamily="34" charset="-122"/>
+                <a:cs typeface="Calibri" pitchFamily="34" charset="-120"/>
+              </a:rPr>
+              <a:t>No result is accepted until an independent critic signs off</a:t>
+            </a:r>
+            <a:endParaRPr lang="en-US" sz="1450" dirty="0"/>
+          </a:p>
+        </p:txBody>
+      </p:sp>
+      <p:sp>
+        <p:nvSpPr>
+          <p:cNvPr id="5" name="Shape 3"/>
+          <p:cNvSpPr/>
+          <p:nvPr/>
+        </p:nvSpPr>
+        <p:spPr>
+          <a:xfrm>
+            <a:off x="457200" y="1554480"/>
+            <a:ext cx="2331720" cy="1234440"/>
+          </a:xfrm>
+          <a:prstGeom prst="roundRect">
+            <a:avLst>
+              <a:gd name="adj" fmla="val 4444"/>
+            </a:avLst>
+          </a:prstGeom>
+          <a:solidFill>
+            <a:srgbClr val="0B1F3A"/>
+          </a:solidFill>
+          <a:ln/>
+        </p:spPr>
+      </p:sp>
+      <p:sp>
+        <p:nvSpPr>
+          <p:cNvPr id="6" name="Text 4"/>
+          <p:cNvSpPr/>
+          <p:nvPr/>
+        </p:nvSpPr>
+        <p:spPr>
+          <a:xfrm>
+            <a:off x="548640" y="1755648"/>
+            <a:ext cx="2148840" cy="411480"/>
+          </a:xfrm>
+          <a:prstGeom prst="rect">
+            <a:avLst/>
+          </a:prstGeom>
+          <a:noFill/>
+          <a:ln/>
+        </p:spPr>
+        <p:txBody>
+          <a:bodyPr wrap="square" rtlCol="0" anchor="ctr"/>
+          <a:lstStyle/>
+          <a:p>
+            <a:pPr algn="ctr" indent="0" marL="0">
+              <a:buNone/>
+            </a:pPr>
+            <a:r>
+              <a:rPr lang="en-US" sz="1350" b="1" dirty="0">
+                <a:solidFill>
+                  <a:srgbClr val="FFFFFF"/>
+                </a:solidFill>
+                <a:latin typeface="Consolas" pitchFamily="34" charset="0"/>
+                <a:ea typeface="Consolas" pitchFamily="34" charset="-122"/>
+                <a:cs typeface="Consolas" pitchFamily="34" charset="-120"/>
+              </a:rPr>
+              <a:t>lab-pi</a:t>
+            </a:r>
+            <a:endParaRPr lang="en-US" sz="1350" dirty="0"/>
+          </a:p>
+        </p:txBody>
+      </p:sp>
+      <p:sp>
+        <p:nvSpPr>
+          <p:cNvPr id="7" name="Text 5"/>
+          <p:cNvSpPr/>
+          <p:nvPr/>
+        </p:nvSpPr>
+        <p:spPr>
+          <a:xfrm>
+            <a:off x="548640" y="2212848"/>
+            <a:ext cx="2148840" cy="457200"/>
+          </a:xfrm>
+          <a:prstGeom prst="rect">
+            <a:avLst/>
+          </a:prstGeom>
+          <a:noFill/>
+          <a:ln/>
+        </p:spPr>
+        <p:txBody>
+          <a:bodyPr wrap="square" rtlCol="0" anchor="t"/>
+          <a:lstStyle/>
+          <a:p>
+            <a:pPr algn="ctr" indent="0" marL="0">
+              <a:buNone/>
+            </a:pPr>
+            <a:r>
+              <a:rPr lang="en-US" sz="1050" dirty="0">
+                <a:solidFill>
+                  <a:srgbClr val="D7E3F4"/>
+                </a:solidFill>
+                <a:latin typeface="Calibri" pitchFamily="34" charset="0"/>
+                <a:ea typeface="Calibri" pitchFamily="34" charset="-122"/>
+                <a:cs typeface="Calibri" pitchFamily="34" charset="-120"/>
+              </a:rPr>
+              <a:t>delegates a</a:t>
+            </a:r>
+            <a:endParaRPr lang="en-US" sz="1050" dirty="0"/>
+          </a:p>
+          <a:p>
+            <a:pPr algn="ctr" indent="0" marL="0">
+              <a:buNone/>
+            </a:pPr>
+            <a:r>
+              <a:rPr lang="en-US" sz="1050" dirty="0">
+                <a:solidFill>
+                  <a:srgbClr val="D7E3F4"/>
+                </a:solidFill>
+                <a:latin typeface="Calibri" pitchFamily="34" charset="0"/>
+                <a:ea typeface="Calibri" pitchFamily="34" charset="-122"/>
+                <a:cs typeface="Calibri" pitchFamily="34" charset="-120"/>
+              </a:rPr>
+              <a:t>scoped task</a:t>
+            </a:r>
+            <a:endParaRPr lang="en-US" sz="1050" dirty="0"/>
+          </a:p>
+        </p:txBody>
+      </p:sp>
+      <p:sp>
+        <p:nvSpPr>
+          <p:cNvPr id="8" name="Text 6"/>
+          <p:cNvSpPr/>
+          <p:nvPr/>
+        </p:nvSpPr>
+        <p:spPr>
+          <a:xfrm>
+            <a:off x="2770632" y="1938528"/>
+            <a:ext cx="548640" cy="457200"/>
+          </a:xfrm>
+          <a:prstGeom prst="rect">
+            <a:avLst/>
+          </a:prstGeom>
+          <a:noFill/>
+          <a:ln/>
+        </p:spPr>
+        <p:txBody>
+          <a:bodyPr wrap="square" rtlCol="0" anchor="ctr"/>
+          <a:lstStyle/>
+          <a:p>
+            <a:pPr algn="ctr" indent="0" marL="0">
+              <a:buNone/>
+            </a:pPr>
+            <a:r>
+              <a:rPr lang="en-US" sz="1600" dirty="0">
+                <a:solidFill>
+                  <a:srgbClr val="E0A100"/>
+                </a:solidFill>
+                <a:latin typeface="Calibri" pitchFamily="34" charset="0"/>
+                <a:ea typeface="Calibri" pitchFamily="34" charset="-122"/>
+                <a:cs typeface="Calibri" pitchFamily="34" charset="-120"/>
+              </a:rPr>
+              <a:t>▶</a:t>
+            </a:r>
+            <a:endParaRPr lang="en-US" sz="1600" dirty="0"/>
+          </a:p>
+        </p:txBody>
+      </p:sp>
+      <p:sp>
+        <p:nvSpPr>
+          <p:cNvPr id="9" name="Shape 7"/>
+          <p:cNvSpPr/>
+          <p:nvPr/>
+        </p:nvSpPr>
+        <p:spPr>
+          <a:xfrm>
+            <a:off x="3383280" y="1554480"/>
+            <a:ext cx="2331720" cy="1234440"/>
+          </a:xfrm>
+          <a:prstGeom prst="roundRect">
+            <a:avLst>
+              <a:gd name="adj" fmla="val 4444"/>
+            </a:avLst>
+          </a:prstGeom>
+          <a:solidFill>
+            <a:srgbClr val="1C7293"/>
+          </a:solidFill>
+          <a:ln/>
+        </p:spPr>
+      </p:sp>
+      <p:sp>
+        <p:nvSpPr>
+          <p:cNvPr id="10" name="Text 8"/>
+          <p:cNvSpPr/>
+          <p:nvPr/>
+        </p:nvSpPr>
+        <p:spPr>
+          <a:xfrm>
+            <a:off x="3474720" y="1755648"/>
+            <a:ext cx="2148840" cy="411480"/>
+          </a:xfrm>
+          <a:prstGeom prst="rect">
+            <a:avLst/>
+          </a:prstGeom>
+          <a:noFill/>
+          <a:ln/>
+        </p:spPr>
+        <p:txBody>
+          <a:bodyPr wrap="square" rtlCol="0" anchor="ctr"/>
+          <a:lstStyle/>
+          <a:p>
+            <a:pPr algn="ctr" indent="0" marL="0">
+              <a:buNone/>
+            </a:pPr>
+            <a:r>
+              <a:rPr lang="en-US" sz="1350" b="1" dirty="0">
+                <a:solidFill>
+                  <a:srgbClr val="FFFFFF"/>
+                </a:solidFill>
+                <a:latin typeface="Consolas" pitchFamily="34" charset="0"/>
+                <a:ea typeface="Consolas" pitchFamily="34" charset="-122"/>
+                <a:cs typeface="Consolas" pitchFamily="34" charset="-120"/>
+              </a:rPr>
+              <a:t>Specialist</a:t>
+            </a:r>
+            <a:endParaRPr lang="en-US" sz="1350" dirty="0"/>
+          </a:p>
+        </p:txBody>
+      </p:sp>
+      <p:sp>
+        <p:nvSpPr>
+          <p:cNvPr id="11" name="Text 9"/>
+          <p:cNvSpPr/>
+          <p:nvPr/>
+        </p:nvSpPr>
+        <p:spPr>
+          <a:xfrm>
+            <a:off x="3474720" y="2212848"/>
+            <a:ext cx="2148840" cy="457200"/>
+          </a:xfrm>
+          <a:prstGeom prst="rect">
+            <a:avLst/>
+          </a:prstGeom>
+          <a:noFill/>
+          <a:ln/>
+        </p:spPr>
+        <p:txBody>
+          <a:bodyPr wrap="square" rtlCol="0" anchor="t"/>
+          <a:lstStyle/>
+          <a:p>
+            <a:pPr algn="ctr" indent="0" marL="0">
+              <a:buNone/>
+            </a:pPr>
+            <a:r>
+              <a:rPr lang="en-US" sz="1050" dirty="0">
+                <a:solidFill>
+                  <a:srgbClr val="D7E3F4"/>
+                </a:solidFill>
+                <a:latin typeface="Calibri" pitchFamily="34" charset="0"/>
+                <a:ea typeface="Calibri" pitchFamily="34" charset="-122"/>
+                <a:cs typeface="Calibri" pitchFamily="34" charset="-120"/>
+              </a:rPr>
+              <a:t>writes</a:t>
+            </a:r>
+            <a:endParaRPr lang="en-US" sz="1050" dirty="0"/>
+          </a:p>
+          <a:p>
+            <a:pPr algn="ctr" indent="0" marL="0">
+              <a:buNone/>
+            </a:pPr>
+            <a:r>
+              <a:rPr lang="en-US" sz="1050" dirty="0">
+                <a:solidFill>
+                  <a:srgbClr val="D7E3F4"/>
+                </a:solidFill>
+                <a:latin typeface="Calibri" pitchFamily="34" charset="0"/>
+                <a:ea typeface="Calibri" pitchFamily="34" charset="-122"/>
+                <a:cs typeface="Calibri" pitchFamily="34" charset="-120"/>
+              </a:rPr>
+              <a:t>tasks/&lt;id&gt;/</a:t>
+            </a:r>
+            <a:endParaRPr lang="en-US" sz="1050" dirty="0"/>
+          </a:p>
+        </p:txBody>
+      </p:sp>
+      <p:sp>
+        <p:nvSpPr>
+          <p:cNvPr id="12" name="Text 10"/>
+          <p:cNvSpPr/>
+          <p:nvPr/>
+        </p:nvSpPr>
+        <p:spPr>
+          <a:xfrm>
+            <a:off x="5696712" y="1938528"/>
+            <a:ext cx="548640" cy="457200"/>
+          </a:xfrm>
+          <a:prstGeom prst="rect">
+            <a:avLst/>
+          </a:prstGeom>
+          <a:noFill/>
+          <a:ln/>
+        </p:spPr>
+        <p:txBody>
+          <a:bodyPr wrap="square" rtlCol="0" anchor="ctr"/>
+          <a:lstStyle/>
+          <a:p>
+            <a:pPr algn="ctr" indent="0" marL="0">
+              <a:buNone/>
+            </a:pPr>
+            <a:r>
+              <a:rPr lang="en-US" sz="1600" dirty="0">
+                <a:solidFill>
+                  <a:srgbClr val="E0A100"/>
+                </a:solidFill>
+                <a:latin typeface="Calibri" pitchFamily="34" charset="0"/>
+                <a:ea typeface="Calibri" pitchFamily="34" charset="-122"/>
+                <a:cs typeface="Calibri" pitchFamily="34" charset="-120"/>
+              </a:rPr>
+              <a:t>▶</a:t>
+            </a:r>
+            <a:endParaRPr lang="en-US" sz="1600" dirty="0"/>
+          </a:p>
+        </p:txBody>
+      </p:sp>
+      <p:sp>
+        <p:nvSpPr>
+          <p:cNvPr id="13" name="Shape 11"/>
+          <p:cNvSpPr/>
+          <p:nvPr/>
+        </p:nvSpPr>
+        <p:spPr>
+          <a:xfrm>
+            <a:off x="6309360" y="1554480"/>
+            <a:ext cx="2331720" cy="1234440"/>
+          </a:xfrm>
+          <a:prstGeom prst="roundRect">
+            <a:avLst>
+              <a:gd name="adj" fmla="val 4444"/>
+            </a:avLst>
+          </a:prstGeom>
+          <a:solidFill>
+            <a:srgbClr val="F2A65A"/>
+          </a:solidFill>
+          <a:ln/>
+        </p:spPr>
+      </p:sp>
+      <p:sp>
+        <p:nvSpPr>
+          <p:cNvPr id="14" name="Text 12"/>
+          <p:cNvSpPr/>
+          <p:nvPr/>
+        </p:nvSpPr>
+        <p:spPr>
+          <a:xfrm>
+            <a:off x="6400800" y="1755648"/>
+            <a:ext cx="2148840" cy="411480"/>
+          </a:xfrm>
+          <a:prstGeom prst="rect">
+            <a:avLst/>
+          </a:prstGeom>
+          <a:noFill/>
+          <a:ln/>
+        </p:spPr>
+        <p:txBody>
+          <a:bodyPr wrap="square" rtlCol="0" anchor="ctr"/>
+          <a:lstStyle/>
+          <a:p>
+            <a:pPr algn="ctr" indent="0" marL="0">
+              <a:buNone/>
+            </a:pPr>
+            <a:r>
+              <a:rPr lang="en-US" sz="1350" b="1" dirty="0">
+                <a:solidFill>
+                  <a:srgbClr val="FFFFFF"/>
+                </a:solidFill>
+                <a:latin typeface="Consolas" pitchFamily="34" charset="0"/>
+                <a:ea typeface="Consolas" pitchFamily="34" charset="-122"/>
+                <a:cs typeface="Consolas" pitchFamily="34" charset="-120"/>
+              </a:rPr>
+              <a:t>Critic</a:t>
+            </a:r>
+            <a:endParaRPr lang="en-US" sz="1350" dirty="0"/>
+          </a:p>
+        </p:txBody>
+      </p:sp>
+      <p:sp>
+        <p:nvSpPr>
+          <p:cNvPr id="15" name="Text 13"/>
+          <p:cNvSpPr/>
+          <p:nvPr/>
+        </p:nvSpPr>
+        <p:spPr>
+          <a:xfrm>
+            <a:off x="6400800" y="2212848"/>
+            <a:ext cx="2148840" cy="457200"/>
+          </a:xfrm>
+          <a:prstGeom prst="rect">
+            <a:avLst/>
+          </a:prstGeom>
+          <a:noFill/>
+          <a:ln/>
+        </p:spPr>
+        <p:txBody>
+          <a:bodyPr wrap="square" rtlCol="0" anchor="t"/>
+          <a:lstStyle/>
+          <a:p>
+            <a:pPr algn="ctr" indent="0" marL="0">
+              <a:buNone/>
+            </a:pPr>
+            <a:r>
+              <a:rPr lang="en-US" sz="1050" dirty="0">
+                <a:solidFill>
+                  <a:srgbClr val="D7E3F4"/>
+                </a:solidFill>
+                <a:latin typeface="Calibri" pitchFamily="34" charset="0"/>
+                <a:ea typeface="Calibri" pitchFamily="34" charset="-122"/>
+                <a:cs typeface="Calibri" pitchFamily="34" charset="-120"/>
+              </a:rPr>
+              <a:t>writes</a:t>
+            </a:r>
+            <a:endParaRPr lang="en-US" sz="1050" dirty="0"/>
+          </a:p>
+          <a:p>
+            <a:pPr algn="ctr" indent="0" marL="0">
+              <a:buNone/>
+            </a:pPr>
+            <a:r>
+              <a:rPr lang="en-US" sz="1050" dirty="0">
+                <a:solidFill>
+                  <a:srgbClr val="D7E3F4"/>
+                </a:solidFill>
+                <a:latin typeface="Calibri" pitchFamily="34" charset="0"/>
+                <a:ea typeface="Calibri" pitchFamily="34" charset="-122"/>
+                <a:cs typeface="Calibri" pitchFamily="34" charset="-120"/>
+              </a:rPr>
+              <a:t>reviews/&lt;id&gt;/</a:t>
+            </a:r>
+            <a:endParaRPr lang="en-US" sz="1050" dirty="0"/>
+          </a:p>
+        </p:txBody>
+      </p:sp>
+      <p:sp>
+        <p:nvSpPr>
+          <p:cNvPr id="16" name="Text 14"/>
+          <p:cNvSpPr/>
+          <p:nvPr/>
+        </p:nvSpPr>
+        <p:spPr>
+          <a:xfrm>
+            <a:off x="8622792" y="1938528"/>
+            <a:ext cx="548640" cy="457200"/>
+          </a:xfrm>
+          <a:prstGeom prst="rect">
+            <a:avLst/>
+          </a:prstGeom>
+          <a:noFill/>
+          <a:ln/>
+        </p:spPr>
+        <p:txBody>
+          <a:bodyPr wrap="square" rtlCol="0" anchor="ctr"/>
+          <a:lstStyle/>
+          <a:p>
+            <a:pPr algn="ctr" indent="0" marL="0">
+              <a:buNone/>
+            </a:pPr>
+            <a:r>
+              <a:rPr lang="en-US" sz="1600" dirty="0">
+                <a:solidFill>
+                  <a:srgbClr val="E0A100"/>
+                </a:solidFill>
+                <a:latin typeface="Calibri" pitchFamily="34" charset="0"/>
+                <a:ea typeface="Calibri" pitchFamily="34" charset="-122"/>
+                <a:cs typeface="Calibri" pitchFamily="34" charset="-120"/>
+              </a:rPr>
+              <a:t>▶</a:t>
+            </a:r>
+            <a:endParaRPr lang="en-US" sz="1600" dirty="0"/>
+          </a:p>
+        </p:txBody>
+      </p:sp>
+      <p:sp>
+        <p:nvSpPr>
+          <p:cNvPr id="17" name="Shape 15"/>
+          <p:cNvSpPr/>
+          <p:nvPr/>
+        </p:nvSpPr>
+        <p:spPr>
+          <a:xfrm>
+            <a:off x="9235440" y="1554480"/>
+            <a:ext cx="2331720" cy="1234440"/>
+          </a:xfrm>
+          <a:prstGeom prst="roundRect">
+            <a:avLst>
+              <a:gd name="adj" fmla="val 4444"/>
+            </a:avLst>
+          </a:prstGeom>
+          <a:solidFill>
+            <a:srgbClr val="0B1F3A"/>
+          </a:solidFill>
+          <a:ln/>
+        </p:spPr>
+      </p:sp>
+      <p:sp>
+        <p:nvSpPr>
+          <p:cNvPr id="18" name="Text 16"/>
+          <p:cNvSpPr/>
+          <p:nvPr/>
+        </p:nvSpPr>
+        <p:spPr>
+          <a:xfrm>
+            <a:off x="9326880" y="1755648"/>
+            <a:ext cx="2148840" cy="411480"/>
+          </a:xfrm>
+          <a:prstGeom prst="rect">
+            <a:avLst/>
+          </a:prstGeom>
+          <a:noFill/>
+          <a:ln/>
+        </p:spPr>
+        <p:txBody>
+          <a:bodyPr wrap="square" rtlCol="0" anchor="ctr"/>
+          <a:lstStyle/>
+          <a:p>
+            <a:pPr algn="ctr" indent="0" marL="0">
+              <a:buNone/>
+            </a:pPr>
+            <a:r>
+              <a:rPr lang="en-US" sz="1350" b="1" dirty="0">
+                <a:solidFill>
+                  <a:srgbClr val="FFFFFF"/>
+                </a:solidFill>
+                <a:latin typeface="Consolas" pitchFamily="34" charset="0"/>
+                <a:ea typeface="Consolas" pitchFamily="34" charset="-122"/>
+                <a:cs typeface="Consolas" pitchFamily="34" charset="-120"/>
+              </a:rPr>
+              <a:t>lab-pi</a:t>
+            </a:r>
+            <a:endParaRPr lang="en-US" sz="1350" dirty="0"/>
+          </a:p>
+        </p:txBody>
+      </p:sp>
+      <p:sp>
+        <p:nvSpPr>
+          <p:cNvPr id="19" name="Text 17"/>
+          <p:cNvSpPr/>
+          <p:nvPr/>
+        </p:nvSpPr>
+        <p:spPr>
+          <a:xfrm>
+            <a:off x="9326880" y="2212848"/>
+            <a:ext cx="2148840" cy="457200"/>
+          </a:xfrm>
+          <a:prstGeom prst="rect">
+            <a:avLst/>
+          </a:prstGeom>
+          <a:noFill/>
+          <a:ln/>
+        </p:spPr>
+        <p:txBody>
+          <a:bodyPr wrap="square" rtlCol="0" anchor="t"/>
+          <a:lstStyle/>
+          <a:p>
+            <a:pPr algn="ctr" indent="0" marL="0">
+              <a:buNone/>
+            </a:pPr>
+            <a:r>
+              <a:rPr lang="en-US" sz="1050" dirty="0">
+                <a:solidFill>
+                  <a:srgbClr val="D7E3F4"/>
+                </a:solidFill>
+                <a:latin typeface="Calibri" pitchFamily="34" charset="0"/>
+                <a:ea typeface="Calibri" pitchFamily="34" charset="-122"/>
+                <a:cs typeface="Calibri" pitchFamily="34" charset="-120"/>
+              </a:rPr>
+              <a:t>records in</a:t>
+            </a:r>
+            <a:endParaRPr lang="en-US" sz="1050" dirty="0"/>
+          </a:p>
+          <a:p>
+            <a:pPr algn="ctr" indent="0" marL="0">
+              <a:buNone/>
+            </a:pPr>
+            <a:r>
+              <a:rPr lang="en-US" sz="1050" dirty="0">
+                <a:solidFill>
+                  <a:srgbClr val="D7E3F4"/>
+                </a:solidFill>
+                <a:latin typeface="Calibri" pitchFamily="34" charset="0"/>
+                <a:ea typeface="Calibri" pitchFamily="34" charset="-122"/>
+                <a:cs typeface="Calibri" pitchFamily="34" charset="-120"/>
+              </a:rPr>
+              <a:t>lab_notebook.md</a:t>
+            </a:r>
+            <a:endParaRPr lang="en-US" sz="1050" dirty="0"/>
+          </a:p>
+        </p:txBody>
+      </p:sp>
+      <p:sp>
+        <p:nvSpPr>
+          <p:cNvPr id="20" name="Text 18"/>
+          <p:cNvSpPr/>
+          <p:nvPr/>
+        </p:nvSpPr>
+        <p:spPr>
+          <a:xfrm>
+            <a:off x="3383280" y="2889504"/>
+            <a:ext cx="8321040" cy="310896"/>
+          </a:xfrm>
+          <a:prstGeom prst="rect">
+            <a:avLst/>
+          </a:prstGeom>
+          <a:noFill/>
+          <a:ln/>
+        </p:spPr>
+        <p:txBody>
+          <a:bodyPr wrap="square" rtlCol="0" anchor="ctr"/>
+          <a:lstStyle/>
+          <a:p>
+            <a:pPr algn="l" indent="0" marL="0">
+              <a:buNone/>
+            </a:pPr>
+            <a:r>
+              <a:rPr lang="en-US" sz="1150" i="1" dirty="0">
+                <a:solidFill>
+                  <a:srgbClr val="B5532A"/>
+                </a:solidFill>
+                <a:latin typeface="Calibri" pitchFamily="34" charset="0"/>
+                <a:ea typeface="Calibri" pitchFamily="34" charset="-122"/>
+                <a:cs typeface="Calibri" pitchFamily="34" charset="-120"/>
+              </a:rPr>
+              <a:t>↩  revise → back to the specialist  (bounded to 2 rounds, then record the blocker)</a:t>
+            </a:r>
+            <a:endParaRPr lang="en-US" sz="1150" dirty="0"/>
+          </a:p>
+        </p:txBody>
+      </p:sp>
+      <p:sp>
+        <p:nvSpPr>
+          <p:cNvPr id="21" name="Shape 19"/>
+          <p:cNvSpPr/>
+          <p:nvPr/>
+        </p:nvSpPr>
+        <p:spPr>
+          <a:xfrm>
+            <a:off x="457200" y="3310128"/>
+            <a:ext cx="3657600" cy="868680"/>
+          </a:xfrm>
+          <a:prstGeom prst="roundRect">
+            <a:avLst>
+              <a:gd name="adj" fmla="val 6316"/>
+            </a:avLst>
+          </a:prstGeom>
+          <a:solidFill>
+            <a:srgbClr val="E8EEF4"/>
+          </a:solidFill>
+          <a:ln w="12700">
+            <a:solidFill>
+              <a:srgbClr val="C9D4E0"/>
+            </a:solidFill>
+            <a:prstDash val="solid"/>
+          </a:ln>
+        </p:spPr>
+      </p:sp>
+      <p:sp>
+        <p:nvSpPr>
+          <p:cNvPr id="22" name="Shape 20"/>
+          <p:cNvSpPr/>
+          <p:nvPr/>
+        </p:nvSpPr>
+        <p:spPr>
+          <a:xfrm>
+            <a:off x="640080" y="3557016"/>
+            <a:ext cx="1143000" cy="384048"/>
+          </a:xfrm>
+          <a:prstGeom prst="roundRect">
+            <a:avLst>
+              <a:gd name="adj" fmla="val 19048"/>
+            </a:avLst>
+          </a:prstGeom>
+          <a:solidFill>
+            <a:srgbClr val="2E8B57"/>
+          </a:solidFill>
+          <a:ln/>
+        </p:spPr>
+      </p:sp>
+      <p:sp>
+        <p:nvSpPr>
+          <p:cNvPr id="23" name="Text 21"/>
+          <p:cNvSpPr/>
+          <p:nvPr/>
+        </p:nvSpPr>
+        <p:spPr>
+          <a:xfrm>
+            <a:off x="640080" y="3557016"/>
+            <a:ext cx="1143000" cy="384048"/>
+          </a:xfrm>
+          <a:prstGeom prst="rect">
+            <a:avLst/>
+          </a:prstGeom>
+          <a:noFill/>
+          <a:ln/>
+        </p:spPr>
+        <p:txBody>
+          <a:bodyPr wrap="square" rtlCol="0" anchor="ctr"/>
+          <a:lstStyle/>
+          <a:p>
+            <a:pPr algn="ctr" indent="0" marL="0">
+              <a:buNone/>
+            </a:pPr>
+            <a:r>
+              <a:rPr lang="en-US" sz="1250" b="1" dirty="0">
+                <a:solidFill>
+                  <a:srgbClr val="FFFFFF"/>
+                </a:solidFill>
+                <a:latin typeface="Consolas" pitchFamily="34" charset="0"/>
+                <a:ea typeface="Consolas" pitchFamily="34" charset="-122"/>
+                <a:cs typeface="Consolas" pitchFamily="34" charset="-120"/>
+              </a:rPr>
+              <a:t>accept</a:t>
+            </a:r>
+            <a:endParaRPr lang="en-US" sz="1250" dirty="0"/>
+          </a:p>
+        </p:txBody>
+      </p:sp>
+      <p:sp>
+        <p:nvSpPr>
+          <p:cNvPr id="24" name="Text 22"/>
+          <p:cNvSpPr/>
+          <p:nvPr/>
+        </p:nvSpPr>
+        <p:spPr>
+          <a:xfrm>
+            <a:off x="1920240" y="3474720"/>
+            <a:ext cx="2057400" cy="566928"/>
+          </a:xfrm>
+          <a:prstGeom prst="rect">
+            <a:avLst/>
+          </a:prstGeom>
+          <a:noFill/>
+          <a:ln/>
+        </p:spPr>
+        <p:txBody>
+          <a:bodyPr wrap="square" rtlCol="0" anchor="ctr"/>
+          <a:lstStyle/>
+          <a:p>
+            <a:pPr algn="l" indent="0" marL="0">
+              <a:lnSpc>
+                <a:spcPct val="100000"/>
+              </a:lnSpc>
+              <a:buNone/>
+            </a:pPr>
+            <a:r>
+              <a:rPr lang="en-US" sz="1100" dirty="0">
+                <a:solidFill>
+                  <a:srgbClr val="1A1A1A"/>
+                </a:solidFill>
+                <a:latin typeface="Calibri" pitchFamily="34" charset="0"/>
+                <a:ea typeface="Calibri" pitchFamily="34" charset="-122"/>
+                <a:cs typeface="Calibri" pitchFamily="34" charset="-120"/>
+              </a:rPr>
+              <a:t>PI records it and closes the task</a:t>
+            </a:r>
+            <a:endParaRPr lang="en-US" sz="1100" dirty="0"/>
+          </a:p>
+        </p:txBody>
+      </p:sp>
+      <p:sp>
+        <p:nvSpPr>
+          <p:cNvPr id="25" name="Shape 23"/>
+          <p:cNvSpPr/>
+          <p:nvPr/>
+        </p:nvSpPr>
+        <p:spPr>
+          <a:xfrm>
+            <a:off x="4370832" y="3310128"/>
+            <a:ext cx="3657600" cy="868680"/>
+          </a:xfrm>
+          <a:prstGeom prst="roundRect">
+            <a:avLst>
+              <a:gd name="adj" fmla="val 6316"/>
+            </a:avLst>
+          </a:prstGeom>
+          <a:solidFill>
+            <a:srgbClr val="E8EEF4"/>
+          </a:solidFill>
+          <a:ln w="12700">
+            <a:solidFill>
+              <a:srgbClr val="C9D4E0"/>
+            </a:solidFill>
+            <a:prstDash val="solid"/>
+          </a:ln>
+        </p:spPr>
+      </p:sp>
+      <p:sp>
+        <p:nvSpPr>
+          <p:cNvPr id="26" name="Shape 24"/>
+          <p:cNvSpPr/>
+          <p:nvPr/>
+        </p:nvSpPr>
+        <p:spPr>
+          <a:xfrm>
+            <a:off x="4553712" y="3557016"/>
+            <a:ext cx="1143000" cy="384048"/>
+          </a:xfrm>
+          <a:prstGeom prst="roundRect">
+            <a:avLst>
+              <a:gd name="adj" fmla="val 19048"/>
+            </a:avLst>
+          </a:prstGeom>
+          <a:solidFill>
+            <a:srgbClr val="D98A00"/>
+          </a:solidFill>
+          <a:ln/>
+        </p:spPr>
+      </p:sp>
+      <p:sp>
+        <p:nvSpPr>
+          <p:cNvPr id="27" name="Text 25"/>
+          <p:cNvSpPr/>
+          <p:nvPr/>
+        </p:nvSpPr>
+        <p:spPr>
+          <a:xfrm>
+            <a:off x="4553712" y="3557016"/>
+            <a:ext cx="1143000" cy="384048"/>
+          </a:xfrm>
+          <a:prstGeom prst="rect">
+            <a:avLst/>
+          </a:prstGeom>
+          <a:noFill/>
+          <a:ln/>
+        </p:spPr>
+        <p:txBody>
+          <a:bodyPr wrap="square" rtlCol="0" anchor="ctr"/>
+          <a:lstStyle/>
+          <a:p>
+            <a:pPr algn="ctr" indent="0" marL="0">
+              <a:buNone/>
+            </a:pPr>
+            <a:r>
+              <a:rPr lang="en-US" sz="1250" b="1" dirty="0">
+                <a:solidFill>
+                  <a:srgbClr val="FFFFFF"/>
+                </a:solidFill>
+                <a:latin typeface="Consolas" pitchFamily="34" charset="0"/>
+                <a:ea typeface="Consolas" pitchFamily="34" charset="-122"/>
+                <a:cs typeface="Consolas" pitchFamily="34" charset="-120"/>
+              </a:rPr>
+              <a:t>revise</a:t>
+            </a:r>
+            <a:endParaRPr lang="en-US" sz="1250" dirty="0"/>
+          </a:p>
+        </p:txBody>
+      </p:sp>
+      <p:sp>
+        <p:nvSpPr>
+          <p:cNvPr id="28" name="Text 26"/>
+          <p:cNvSpPr/>
+          <p:nvPr/>
+        </p:nvSpPr>
+        <p:spPr>
+          <a:xfrm>
+            <a:off x="5833872" y="3474720"/>
+            <a:ext cx="2057400" cy="566928"/>
+          </a:xfrm>
+          <a:prstGeom prst="rect">
+            <a:avLst/>
+          </a:prstGeom>
+          <a:noFill/>
+          <a:ln/>
+        </p:spPr>
+        <p:txBody>
+          <a:bodyPr wrap="square" rtlCol="0" anchor="ctr"/>
+          <a:lstStyle/>
+          <a:p>
+            <a:pPr algn="l" indent="0" marL="0">
+              <a:lnSpc>
+                <a:spcPct val="100000"/>
+              </a:lnSpc>
+              <a:buNone/>
+            </a:pPr>
+            <a:r>
+              <a:rPr lang="en-US" sz="1100" dirty="0">
+                <a:solidFill>
+                  <a:srgbClr val="1A1A1A"/>
+                </a:solidFill>
+                <a:latin typeface="Calibri" pitchFamily="34" charset="0"/>
+                <a:ea typeface="Calibri" pitchFamily="34" charset="-122"/>
+                <a:cs typeface="Calibri" pitchFamily="34" charset="-120"/>
+              </a:rPr>
+              <a:t>exact fixes sent back to the specialist</a:t>
+            </a:r>
+            <a:endParaRPr lang="en-US" sz="1100" dirty="0"/>
+          </a:p>
+        </p:txBody>
+      </p:sp>
+      <p:sp>
+        <p:nvSpPr>
+          <p:cNvPr id="29" name="Shape 27"/>
+          <p:cNvSpPr/>
+          <p:nvPr/>
+        </p:nvSpPr>
+        <p:spPr>
+          <a:xfrm>
+            <a:off x="8284464" y="3310128"/>
+            <a:ext cx="3657600" cy="868680"/>
+          </a:xfrm>
+          <a:prstGeom prst="roundRect">
+            <a:avLst>
+              <a:gd name="adj" fmla="val 6316"/>
+            </a:avLst>
+          </a:prstGeom>
+          <a:solidFill>
+            <a:srgbClr val="E8EEF4"/>
+          </a:solidFill>
+          <a:ln w="12700">
+            <a:solidFill>
+              <a:srgbClr val="C9D4E0"/>
+            </a:solidFill>
+            <a:prstDash val="solid"/>
+          </a:ln>
+        </p:spPr>
+      </p:sp>
+      <p:sp>
+        <p:nvSpPr>
+          <p:cNvPr id="30" name="Shape 28"/>
+          <p:cNvSpPr/>
+          <p:nvPr/>
+        </p:nvSpPr>
+        <p:spPr>
+          <a:xfrm>
+            <a:off x="8467344" y="3557016"/>
+            <a:ext cx="1143000" cy="384048"/>
+          </a:xfrm>
+          <a:prstGeom prst="roundRect">
+            <a:avLst>
+              <a:gd name="adj" fmla="val 19048"/>
+            </a:avLst>
+          </a:prstGeom>
+          <a:solidFill>
+            <a:srgbClr val="C44536"/>
+          </a:solidFill>
+          <a:ln/>
+        </p:spPr>
+      </p:sp>
+      <p:sp>
+        <p:nvSpPr>
+          <p:cNvPr id="31" name="Text 29"/>
+          <p:cNvSpPr/>
+          <p:nvPr/>
+        </p:nvSpPr>
+        <p:spPr>
+          <a:xfrm>
+            <a:off x="8467344" y="3557016"/>
+            <a:ext cx="1143000" cy="384048"/>
+          </a:xfrm>
+          <a:prstGeom prst="rect">
+            <a:avLst/>
+          </a:prstGeom>
+          <a:noFill/>
+          <a:ln/>
+        </p:spPr>
+        <p:txBody>
+          <a:bodyPr wrap="square" rtlCol="0" anchor="ctr"/>
+          <a:lstStyle/>
+          <a:p>
+            <a:pPr algn="ctr" indent="0" marL="0">
+              <a:buNone/>
+            </a:pPr>
+            <a:r>
+              <a:rPr lang="en-US" sz="1250" b="1" dirty="0">
+                <a:solidFill>
+                  <a:srgbClr val="FFFFFF"/>
+                </a:solidFill>
+                <a:latin typeface="Consolas" pitchFamily="34" charset="0"/>
+                <a:ea typeface="Consolas" pitchFamily="34" charset="-122"/>
+                <a:cs typeface="Consolas" pitchFamily="34" charset="-120"/>
+              </a:rPr>
+              <a:t>reject</a:t>
+            </a:r>
+            <a:endParaRPr lang="en-US" sz="1250" dirty="0"/>
+          </a:p>
+        </p:txBody>
+      </p:sp>
+      <p:sp>
+        <p:nvSpPr>
+          <p:cNvPr id="32" name="Text 30"/>
+          <p:cNvSpPr/>
+          <p:nvPr/>
+        </p:nvSpPr>
+        <p:spPr>
+          <a:xfrm>
+            <a:off x="9747504" y="3474720"/>
+            <a:ext cx="2057400" cy="566928"/>
+          </a:xfrm>
+          <a:prstGeom prst="rect">
+            <a:avLst/>
+          </a:prstGeom>
+          <a:noFill/>
+          <a:ln/>
+        </p:spPr>
+        <p:txBody>
+          <a:bodyPr wrap="square" rtlCol="0" anchor="ctr"/>
+          <a:lstStyle/>
+          <a:p>
+            <a:pPr algn="l" indent="0" marL="0">
+              <a:lnSpc>
+                <a:spcPct val="100000"/>
+              </a:lnSpc>
+              <a:buNone/>
+            </a:pPr>
+            <a:r>
+              <a:rPr lang="en-US" sz="1100" dirty="0">
+                <a:solidFill>
+                  <a:srgbClr val="1A1A1A"/>
+                </a:solidFill>
+                <a:latin typeface="Calibri" pitchFamily="34" charset="0"/>
+                <a:ea typeface="Calibri" pitchFamily="34" charset="-122"/>
+                <a:cs typeface="Calibri" pitchFamily="34" charset="-120"/>
+              </a:rPr>
+              <a:t>stop that path, or narrow the task</a:t>
+            </a:r>
+            <a:endParaRPr lang="en-US" sz="1100" dirty="0"/>
+          </a:p>
+        </p:txBody>
+      </p:sp>
+      <p:sp>
+        <p:nvSpPr>
+          <p:cNvPr id="33" name="Shape 31"/>
+          <p:cNvSpPr/>
+          <p:nvPr/>
+        </p:nvSpPr>
+        <p:spPr>
+          <a:xfrm>
+            <a:off x="457200" y="4407408"/>
+            <a:ext cx="5486400" cy="1783080"/>
+          </a:xfrm>
+          <a:prstGeom prst="roundRect">
+            <a:avLst>
+              <a:gd name="adj" fmla="val 3077"/>
+            </a:avLst>
+          </a:prstGeom>
+          <a:solidFill>
+            <a:srgbClr val="0E2138"/>
+          </a:solidFill>
+          <a:ln w="12700">
+            <a:solidFill>
+              <a:srgbClr val="1C3A5E"/>
+            </a:solidFill>
+            <a:prstDash val="solid"/>
+          </a:ln>
+        </p:spPr>
+      </p:sp>
+      <p:sp>
+        <p:nvSpPr>
+          <p:cNvPr id="34" name="Text 32"/>
+          <p:cNvSpPr/>
+          <p:nvPr/>
+        </p:nvSpPr>
+        <p:spPr>
+          <a:xfrm>
+            <a:off x="621792" y="4517136"/>
+            <a:ext cx="5157216" cy="1563624"/>
+          </a:xfrm>
+          <a:prstGeom prst="rect">
+            <a:avLst/>
+          </a:prstGeom>
+          <a:noFill/>
+          <a:ln/>
+        </p:spPr>
+        <p:txBody>
+          <a:bodyPr wrap="square" lIns="0" tIns="0" rIns="0" bIns="0" rtlCol="0" anchor="t"/>
+          <a:lstStyle/>
+          <a:p>
+            <a:pPr algn="l" indent="0" marL="0">
+              <a:lnSpc>
+                <a:spcPct val="105000"/>
+              </a:lnSpc>
+              <a:buNone/>
+            </a:pPr>
+            <a:r>
+              <a:rPr lang="en-US" sz="1100" dirty="0">
+                <a:solidFill>
+                  <a:srgbClr val="1C7293"/>
+                </a:solidFill>
+                <a:latin typeface="Consolas" pitchFamily="34" charset="0"/>
+                <a:ea typeface="Consolas" pitchFamily="34" charset="-122"/>
+                <a:cs typeface="Consolas" pitchFamily="34" charset="-120"/>
+              </a:rPr>
+              <a:t># run the lab from OpenCode</a:t>
+            </a:r>
+            <a:endParaRPr lang="en-US" sz="1100" dirty="0"/>
+          </a:p>
+          <a:p>
+            <a:pPr algn="l" indent="0" marL="0">
+              <a:lnSpc>
+                <a:spcPct val="105000"/>
+              </a:lnSpc>
+              <a:buNone/>
+            </a:pPr>
+            <a:r>
+              <a:rPr lang="en-US" sz="1100" dirty="0">
+                <a:solidFill>
+                  <a:srgbClr val="D7E3F4"/>
+                </a:solidFill>
+                <a:latin typeface="Consolas" pitchFamily="34" charset="0"/>
+                <a:ea typeface="Consolas" pitchFamily="34" charset="-122"/>
+                <a:cs typeface="Consolas" pitchFamily="34" charset="-120"/>
+              </a:rPr>
+              <a:t>/lab-research  &lt;question&gt;</a:t>
+            </a:r>
+            <a:endParaRPr lang="en-US" sz="1100" dirty="0"/>
+          </a:p>
+          <a:p>
+            <a:pPr algn="l" indent="0" marL="0">
+              <a:lnSpc>
+                <a:spcPct val="105000"/>
+              </a:lnSpc>
+              <a:buNone/>
+            </a:pPr>
+            <a:r>
+              <a:rPr lang="en-US" sz="1100" dirty="0">
+                <a:solidFill>
+                  <a:srgbClr val="D7E3F4"/>
+                </a:solidFill>
+                <a:latin typeface="Consolas" pitchFamily="34" charset="0"/>
+                <a:ea typeface="Consolas" pitchFamily="34" charset="-122"/>
+                <a:cs typeface="Consolas" pitchFamily="34" charset="-120"/>
+              </a:rPr>
+              <a:t>/lab-start     &lt;task&gt;</a:t>
+            </a:r>
+            <a:endParaRPr lang="en-US" sz="1100" dirty="0"/>
+          </a:p>
+          <a:p>
+            <a:pPr algn="l" indent="0" marL="0">
+              <a:lnSpc>
+                <a:spcPct val="105000"/>
+              </a:lnSpc>
+              <a:buNone/>
+            </a:pPr>
+            <a:r>
+              <a:rPr lang="en-US" sz="1100" dirty="0">
+                <a:solidFill>
+                  <a:srgbClr val="D7E3F4"/>
+                </a:solidFill>
+                <a:latin typeface="Consolas" pitchFamily="34" charset="0"/>
+                <a:ea typeface="Consolas" pitchFamily="34" charset="-122"/>
+                <a:cs typeface="Consolas" pitchFamily="34" charset="-120"/>
+              </a:rPr>
+              <a:t>/lab-delegate  &lt;id + role&gt;</a:t>
+            </a:r>
+            <a:endParaRPr lang="en-US" sz="1100" dirty="0"/>
+          </a:p>
+          <a:p>
+            <a:pPr algn="l" indent="0" marL="0">
+              <a:lnSpc>
+                <a:spcPct val="105000"/>
+              </a:lnSpc>
+              <a:buNone/>
+            </a:pPr>
+            <a:r>
+              <a:rPr lang="en-US" sz="1100" dirty="0">
+                <a:solidFill>
+                  <a:srgbClr val="D7E3F4"/>
+                </a:solidFill>
+                <a:latin typeface="Consolas" pitchFamily="34" charset="0"/>
+                <a:ea typeface="Consolas" pitchFamily="34" charset="-122"/>
+                <a:cs typeface="Consolas" pitchFamily="34" charset="-120"/>
+              </a:rPr>
+              <a:t>/lab-review    &lt;id&gt;</a:t>
+            </a:r>
+            <a:endParaRPr lang="en-US" sz="1100" dirty="0"/>
+          </a:p>
+          <a:p>
+            <a:pPr algn="l" indent="0" marL="0">
+              <a:lnSpc>
+                <a:spcPct val="105000"/>
+              </a:lnSpc>
+              <a:buNone/>
+            </a:pPr>
+            <a:r>
+              <a:rPr lang="en-US" sz="1100" dirty="0">
+                <a:solidFill>
+                  <a:srgbClr val="D7E3F4"/>
+                </a:solidFill>
+                <a:latin typeface="Consolas" pitchFamily="34" charset="0"/>
+                <a:ea typeface="Consolas" pitchFamily="34" charset="-122"/>
+                <a:cs typeface="Consolas" pitchFamily="34" charset="-120"/>
+              </a:rPr>
+              <a:t>/lab-close     &lt;id&gt;</a:t>
+            </a:r>
+            <a:endParaRPr lang="en-US" sz="1100" dirty="0"/>
+          </a:p>
+        </p:txBody>
+      </p:sp>
+      <p:sp>
+        <p:nvSpPr>
+          <p:cNvPr id="35" name="Shape 33"/>
+          <p:cNvSpPr/>
+          <p:nvPr/>
+        </p:nvSpPr>
+        <p:spPr>
+          <a:xfrm>
+            <a:off x="6245352" y="4407408"/>
+            <a:ext cx="5486400" cy="1783080"/>
+          </a:xfrm>
+          <a:prstGeom prst="roundRect">
+            <a:avLst>
+              <a:gd name="adj" fmla="val 2564"/>
+            </a:avLst>
+          </a:prstGeom>
+          <a:solidFill>
+            <a:srgbClr val="E8EEF4"/>
+          </a:solidFill>
+          <a:ln w="12700">
+            <a:solidFill>
+              <a:srgbClr val="C9D4E0"/>
+            </a:solidFill>
+            <a:prstDash val="solid"/>
+          </a:ln>
+        </p:spPr>
+      </p:sp>
+      <p:sp>
+        <p:nvSpPr>
+          <p:cNvPr id="36" name="Text 34"/>
+          <p:cNvSpPr/>
+          <p:nvPr/>
+        </p:nvSpPr>
+        <p:spPr>
+          <a:xfrm>
+            <a:off x="6446520" y="4535424"/>
+            <a:ext cx="5120640" cy="310896"/>
+          </a:xfrm>
+          <a:prstGeom prst="rect">
+            <a:avLst/>
+          </a:prstGeom>
+          <a:noFill/>
+          <a:ln/>
+        </p:spPr>
+        <p:txBody>
+          <a:bodyPr wrap="square" rtlCol="0" anchor="ctr"/>
+          <a:lstStyle/>
+          <a:p>
+            <a:pPr indent="0" marL="0">
+              <a:buNone/>
+            </a:pPr>
+            <a:r>
+              <a:rPr lang="en-US" sz="1450" b="1" dirty="0">
+                <a:solidFill>
+                  <a:srgbClr val="0B1F3A"/>
+                </a:solidFill>
+                <a:latin typeface="Georgia" pitchFamily="34" charset="0"/>
+                <a:ea typeface="Georgia" pitchFamily="34" charset="-122"/>
+                <a:cs typeface="Georgia" pitchFamily="34" charset="-120"/>
+              </a:rPr>
+              <a:t>Guardrails</a:t>
+            </a:r>
+            <a:endParaRPr lang="en-US" sz="1450" dirty="0"/>
+          </a:p>
+        </p:txBody>
+      </p:sp>
+      <p:sp>
+        <p:nvSpPr>
+          <p:cNvPr id="37" name="Text 35"/>
+          <p:cNvSpPr/>
+          <p:nvPr/>
+        </p:nvSpPr>
+        <p:spPr>
+          <a:xfrm>
+            <a:off x="6446520" y="4882896"/>
+            <a:ext cx="182880" cy="310896"/>
+          </a:xfrm>
+          <a:prstGeom prst="rect">
+            <a:avLst/>
+          </a:prstGeom>
+          <a:noFill/>
+          <a:ln/>
+        </p:spPr>
+        <p:txBody>
+          <a:bodyPr wrap="square" rtlCol="0" anchor="t"/>
+          <a:lstStyle/>
+          <a:p>
+            <a:pPr indent="0" marL="0">
+              <a:buNone/>
+            </a:pPr>
+            <a:r>
+              <a:rPr lang="en-US" sz="1100" dirty="0">
+                <a:solidFill>
+                  <a:srgbClr val="F2A65A"/>
+                </a:solidFill>
+                <a:latin typeface="Calibri" pitchFamily="34" charset="0"/>
+                <a:ea typeface="Calibri" pitchFamily="34" charset="-122"/>
+                <a:cs typeface="Calibri" pitchFamily="34" charset="-120"/>
+              </a:rPr>
+              <a:t>•</a:t>
+            </a:r>
+            <a:endParaRPr lang="en-US" sz="1100" dirty="0"/>
+          </a:p>
+        </p:txBody>
+      </p:sp>
+      <p:sp>
+        <p:nvSpPr>
+          <p:cNvPr id="38" name="Text 36"/>
+          <p:cNvSpPr/>
+          <p:nvPr/>
+        </p:nvSpPr>
+        <p:spPr>
+          <a:xfrm>
+            <a:off x="6629400" y="4882896"/>
+            <a:ext cx="4983480" cy="365760"/>
+          </a:xfrm>
+          <a:prstGeom prst="rect">
+            <a:avLst/>
+          </a:prstGeom>
+          <a:noFill/>
+          <a:ln/>
+        </p:spPr>
+        <p:txBody>
+          <a:bodyPr wrap="square" rtlCol="0" anchor="t"/>
+          <a:lstStyle/>
+          <a:p>
+            <a:pPr algn="l" indent="0" marL="0">
+              <a:lnSpc>
+                <a:spcPct val="100000"/>
+              </a:lnSpc>
+              <a:buNone/>
+            </a:pPr>
+            <a:r>
+              <a:rPr lang="en-US" sz="1050" dirty="0">
+                <a:solidFill>
+                  <a:srgbClr val="1A1A1A"/>
+                </a:solidFill>
+                <a:latin typeface="Calibri" pitchFamily="34" charset="0"/>
+                <a:ea typeface="Calibri" pitchFamily="34" charset="-122"/>
+                <a:cs typeface="Calibri" pitchFamily="34" charset="-120"/>
+              </a:rPr>
+              <a:t>lab_notebook.md is append-only — corrections are appended, never rewritten</a:t>
+            </a:r>
+            <a:endParaRPr lang="en-US" sz="1050" dirty="0"/>
+          </a:p>
+        </p:txBody>
+      </p:sp>
+      <p:sp>
+        <p:nvSpPr>
+          <p:cNvPr id="39" name="Text 37"/>
+          <p:cNvSpPr/>
+          <p:nvPr/>
+        </p:nvSpPr>
+        <p:spPr>
+          <a:xfrm>
+            <a:off x="6446520" y="5207508"/>
+            <a:ext cx="182880" cy="310896"/>
+          </a:xfrm>
+          <a:prstGeom prst="rect">
+            <a:avLst/>
+          </a:prstGeom>
+          <a:noFill/>
+          <a:ln/>
+        </p:spPr>
+        <p:txBody>
+          <a:bodyPr wrap="square" rtlCol="0" anchor="t"/>
+          <a:lstStyle/>
+          <a:p>
+            <a:pPr indent="0" marL="0">
+              <a:buNone/>
+            </a:pPr>
+            <a:r>
+              <a:rPr lang="en-US" sz="1100" dirty="0">
+                <a:solidFill>
+                  <a:srgbClr val="F2A65A"/>
+                </a:solidFill>
+                <a:latin typeface="Calibri" pitchFamily="34" charset="0"/>
+                <a:ea typeface="Calibri" pitchFamily="34" charset="-122"/>
+                <a:cs typeface="Calibri" pitchFamily="34" charset="-120"/>
+              </a:rPr>
+              <a:t>•</a:t>
+            </a:r>
+            <a:endParaRPr lang="en-US" sz="1100" dirty="0"/>
+          </a:p>
+        </p:txBody>
+      </p:sp>
+      <p:sp>
+        <p:nvSpPr>
+          <p:cNvPr id="40" name="Text 38"/>
+          <p:cNvSpPr/>
+          <p:nvPr/>
+        </p:nvSpPr>
+        <p:spPr>
+          <a:xfrm>
+            <a:off x="6629400" y="5207508"/>
+            <a:ext cx="4983480" cy="365760"/>
+          </a:xfrm>
+          <a:prstGeom prst="rect">
+            <a:avLst/>
+          </a:prstGeom>
+          <a:noFill/>
+          <a:ln/>
+        </p:spPr>
+        <p:txBody>
+          <a:bodyPr wrap="square" rtlCol="0" anchor="t"/>
+          <a:lstStyle/>
+          <a:p>
+            <a:pPr algn="l" indent="0" marL="0">
+              <a:lnSpc>
+                <a:spcPct val="100000"/>
+              </a:lnSpc>
+              <a:buNone/>
+            </a:pPr>
+            <a:r>
+              <a:rPr lang="en-US" sz="1050" dirty="0">
+                <a:solidFill>
+                  <a:srgbClr val="1A1A1A"/>
+                </a:solidFill>
+                <a:latin typeface="Calibri" pitchFamily="34" charset="0"/>
+                <a:ea typeface="Calibri" pitchFamily="34" charset="-122"/>
+                <a:cs typeface="Calibri" pitchFamily="34" charset="-120"/>
+              </a:rPr>
+              <a:t>No inventing data, papers, paths, job IDs, or outputs</a:t>
+            </a:r>
+            <a:endParaRPr lang="en-US" sz="1050" dirty="0"/>
+          </a:p>
+        </p:txBody>
+      </p:sp>
+      <p:sp>
+        <p:nvSpPr>
+          <p:cNvPr id="41" name="Text 39"/>
+          <p:cNvSpPr/>
+          <p:nvPr/>
+        </p:nvSpPr>
+        <p:spPr>
+          <a:xfrm>
+            <a:off x="6446520" y="5532120"/>
+            <a:ext cx="182880" cy="310896"/>
+          </a:xfrm>
+          <a:prstGeom prst="rect">
+            <a:avLst/>
+          </a:prstGeom>
+          <a:noFill/>
+          <a:ln/>
+        </p:spPr>
+        <p:txBody>
+          <a:bodyPr wrap="square" rtlCol="0" anchor="t"/>
+          <a:lstStyle/>
+          <a:p>
+            <a:pPr indent="0" marL="0">
+              <a:buNone/>
+            </a:pPr>
+            <a:r>
+              <a:rPr lang="en-US" sz="1100" dirty="0">
+                <a:solidFill>
+                  <a:srgbClr val="F2A65A"/>
+                </a:solidFill>
+                <a:latin typeface="Calibri" pitchFamily="34" charset="0"/>
+                <a:ea typeface="Calibri" pitchFamily="34" charset="-122"/>
+                <a:cs typeface="Calibri" pitchFamily="34" charset="-120"/>
+              </a:rPr>
+              <a:t>•</a:t>
+            </a:r>
+            <a:endParaRPr lang="en-US" sz="1100" dirty="0"/>
+          </a:p>
+        </p:txBody>
+      </p:sp>
+      <p:sp>
+        <p:nvSpPr>
+          <p:cNvPr id="42" name="Text 40"/>
+          <p:cNvSpPr/>
+          <p:nvPr/>
+        </p:nvSpPr>
+        <p:spPr>
+          <a:xfrm>
+            <a:off x="6629400" y="5532120"/>
+            <a:ext cx="4983480" cy="365760"/>
+          </a:xfrm>
+          <a:prstGeom prst="rect">
+            <a:avLst/>
+          </a:prstGeom>
+          <a:noFill/>
+          <a:ln/>
+        </p:spPr>
+        <p:txBody>
+          <a:bodyPr wrap="square" rtlCol="0" anchor="t"/>
+          <a:lstStyle/>
+          <a:p>
+            <a:pPr algn="l" indent="0" marL="0">
+              <a:lnSpc>
+                <a:spcPct val="100000"/>
+              </a:lnSpc>
+              <a:buNone/>
+            </a:pPr>
+            <a:r>
+              <a:rPr lang="en-US" sz="1050" dirty="0">
+                <a:solidFill>
+                  <a:srgbClr val="1A1A1A"/>
+                </a:solidFill>
+                <a:latin typeface="Calibri" pitchFamily="34" charset="0"/>
+                <a:ea typeface="Calibri" pitchFamily="34" charset="-122"/>
+                <a:cs typeface="Calibri" pitchFamily="34" charset="-120"/>
+              </a:rPr>
+              <a:t>hpc-operator has bash: deny — Chimera only via MCP tools</a:t>
+            </a:r>
+            <a:endParaRPr lang="en-US" sz="1050" dirty="0"/>
+          </a:p>
+        </p:txBody>
+      </p:sp>
+      <p:sp>
+        <p:nvSpPr>
+          <p:cNvPr id="43" name="Text 41"/>
+          <p:cNvSpPr/>
+          <p:nvPr/>
+        </p:nvSpPr>
+        <p:spPr>
+          <a:xfrm>
+            <a:off x="6446520" y="5856732"/>
+            <a:ext cx="182880" cy="310896"/>
+          </a:xfrm>
+          <a:prstGeom prst="rect">
+            <a:avLst/>
+          </a:prstGeom>
+          <a:noFill/>
+          <a:ln/>
+        </p:spPr>
+        <p:txBody>
+          <a:bodyPr wrap="square" rtlCol="0" anchor="t"/>
+          <a:lstStyle/>
+          <a:p>
+            <a:pPr indent="0" marL="0">
+              <a:buNone/>
+            </a:pPr>
+            <a:r>
+              <a:rPr lang="en-US" sz="1100" dirty="0">
+                <a:solidFill>
+                  <a:srgbClr val="F2A65A"/>
+                </a:solidFill>
+                <a:latin typeface="Calibri" pitchFamily="34" charset="0"/>
+                <a:ea typeface="Calibri" pitchFamily="34" charset="-122"/>
+                <a:cs typeface="Calibri" pitchFamily="34" charset="-120"/>
+              </a:rPr>
+              <a:t>•</a:t>
+            </a:r>
+            <a:endParaRPr lang="en-US" sz="1100" dirty="0"/>
+          </a:p>
+        </p:txBody>
+      </p:sp>
+      <p:sp>
+        <p:nvSpPr>
+          <p:cNvPr id="44" name="Text 42"/>
+          <p:cNvSpPr/>
+          <p:nvPr/>
+        </p:nvSpPr>
+        <p:spPr>
+          <a:xfrm>
+            <a:off x="6629400" y="5856732"/>
+            <a:ext cx="4983480" cy="365760"/>
+          </a:xfrm>
+          <a:prstGeom prst="rect">
+            <a:avLst/>
+          </a:prstGeom>
+          <a:noFill/>
+          <a:ln/>
+        </p:spPr>
+        <p:txBody>
+          <a:bodyPr wrap="square" rtlCol="0" anchor="t"/>
+          <a:lstStyle/>
+          <a:p>
+            <a:pPr algn="l" indent="0" marL="0">
+              <a:lnSpc>
+                <a:spcPct val="100000"/>
+              </a:lnSpc>
+              <a:buNone/>
+            </a:pPr>
+            <a:r>
+              <a:rPr lang="en-US" sz="1050" dirty="0">
+                <a:solidFill>
+                  <a:srgbClr val="1A1A1A"/>
+                </a:solidFill>
+                <a:latin typeface="Calibri" pitchFamily="34" charset="0"/>
+                <a:ea typeface="Calibri" pitchFamily="34" charset="-122"/>
+                <a:cs typeface="Calibri" pitchFamily="34" charset="-120"/>
+              </a:rPr>
+              <a:t>Worked example: research-to-hpc-loop — 5 tasks, all critic-accepted</a:t>
+            </a:r>
+            <a:endParaRPr lang="en-US" sz="1050" dirty="0"/>
+          </a:p>
+        </p:txBody>
+      </p:sp>
+      <p:sp>
+        <p:nvSpPr>
+          <p:cNvPr id="45" name="Shape 43"/>
+          <p:cNvSpPr/>
+          <p:nvPr/>
+        </p:nvSpPr>
+        <p:spPr>
+          <a:xfrm>
+            <a:off x="0" y="6473952"/>
+            <a:ext cx="12191695" cy="384048"/>
+          </a:xfrm>
+          <a:prstGeom prst="rect">
+            <a:avLst/>
+          </a:prstGeom>
+          <a:solidFill>
+            <a:srgbClr val="0B1F3A"/>
+          </a:solidFill>
+          <a:ln/>
+        </p:spPr>
+      </p:sp>
+      <p:sp>
+        <p:nvSpPr>
+          <p:cNvPr id="46" name="Text 44"/>
+          <p:cNvSpPr/>
+          <p:nvPr/>
+        </p:nvSpPr>
+        <p:spPr>
+          <a:xfrm>
+            <a:off x="457200" y="6473952"/>
+            <a:ext cx="8229600" cy="384048"/>
+          </a:xfrm>
+          <a:prstGeom prst="rect">
+            <a:avLst/>
+          </a:prstGeom>
+          <a:noFill/>
+          <a:ln/>
+        </p:spPr>
+        <p:txBody>
+          <a:bodyPr wrap="square" rtlCol="0" anchor="ctr"/>
+          <a:lstStyle/>
+          <a:p>
+            <a:pPr algn="l" indent="0" marL="0">
+              <a:buNone/>
+            </a:pPr>
+            <a:r>
+              <a:rPr lang="en-US" sz="950" dirty="0">
+                <a:solidFill>
+                  <a:srgbClr val="AEBED0"/>
+                </a:solidFill>
+                <a:latin typeface="Calibri" pitchFamily="34" charset="0"/>
+                <a:ea typeface="Calibri" pitchFamily="34" charset="-122"/>
+                <a:cs typeface="Calibri" pitchFamily="34" charset="-120"/>
+              </a:rPr>
+              <a:t>OpenCode — AI coding agents in your terminal</a:t>
+            </a:r>
+            <a:endParaRPr lang="en-US" sz="950" dirty="0"/>
+          </a:p>
+        </p:txBody>
+      </p:sp>
+      <p:sp>
+        <p:nvSpPr>
+          <p:cNvPr id="47" name="Text 45"/>
+          <p:cNvSpPr/>
+          <p:nvPr/>
+        </p:nvSpPr>
+        <p:spPr>
+          <a:xfrm>
+            <a:off x="10332720" y="6473952"/>
+            <a:ext cx="1399032" cy="384048"/>
+          </a:xfrm>
+          <a:prstGeom prst="rect">
+            <a:avLst/>
+          </a:prstGeom>
+          <a:noFill/>
+          <a:ln/>
+        </p:spPr>
+        <p:txBody>
+          <a:bodyPr wrap="square" rtlCol="0" anchor="ctr"/>
+          <a:lstStyle/>
+          <a:p>
+            <a:pPr algn="r" indent="0" marL="0">
+              <a:buNone/>
+            </a:pPr>
+            <a:r>
+              <a:rPr lang="en-US" sz="950" dirty="0">
+                <a:solidFill>
+                  <a:srgbClr val="AEBED0"/>
+                </a:solidFill>
+                <a:latin typeface="Calibri" pitchFamily="34" charset="0"/>
+                <a:ea typeface="Calibri" pitchFamily="34" charset="-122"/>
+                <a:cs typeface="Calibri" pitchFamily="34" charset="-120"/>
+              </a:rPr>
+              <a:t>11 / 12</a:t>
+            </a:r>
+            <a:endParaRPr lang="en-US" sz="950" dirty="0"/>
+          </a:p>
+        </p:txBody>
+      </p:sp>
+    </p:spTree>
+  </p:cSld>
+  <p:clrMapOvr>
+    <a:masterClrMapping/>
+  </p:clrMapOvr>
+</p:sld>
+</file>
+
+<file path=ppt/slides/slide12.xml><?xml version="1.0" encoding="utf-8"?>
+<p:sld xmlns:a="http://schemas.openxmlformats.org/drawingml/2006/main" xmlns:r="http://schemas.openxmlformats.org/officeDocument/2006/relationships" xmlns:p="http://schemas.openxmlformats.org/presentationml/2006/main">
+  <p:cSld name="Slide 12">
+    <p:bg>
+      <p:bgPr>
+        <a:solidFill>
           <a:srgbClr val="0B1F3A"/>
         </a:solidFill>
       </p:bgPr>
@@ -4093,7 +7685,7 @@
                 <a:ea typeface="Calibri" pitchFamily="34" charset="-122"/>
                 <a:cs typeface="Calibri" pitchFamily="34" charset="-120"/>
               </a:rPr>
-              <a:t>2 / 10</a:t>
+              <a:t>2 / 12</a:t>
             </a:r>
             <a:endParaRPr lang="en-US" sz="950" dirty="0"/>
           </a:p>
@@ -4906,7 +8498,7 @@
                 <a:ea typeface="Calibri" pitchFamily="34" charset="-122"/>
                 <a:cs typeface="Calibri" pitchFamily="34" charset="-120"/>
               </a:rPr>
-              <a:t>3 / 10</a:t>
+              <a:t>3 / 12</a:t>
             </a:r>
             <a:endParaRPr lang="en-US" sz="950" dirty="0"/>
           </a:p>
@@ -6129,7 +9721,7 @@
                 <a:ea typeface="Calibri" pitchFamily="34" charset="-122"/>
                 <a:cs typeface="Calibri" pitchFamily="34" charset="-120"/>
               </a:rPr>
-              <a:t>4 / 10</a:t>
+              <a:t>4 / 12</a:t>
             </a:r>
             <a:endParaRPr lang="en-US" sz="950" dirty="0"/>
           </a:p>
@@ -7248,7 +10840,7 @@
                 <a:ea typeface="Calibri" pitchFamily="34" charset="-122"/>
                 <a:cs typeface="Calibri" pitchFamily="34" charset="-120"/>
               </a:rPr>
-              <a:t>5 / 10</a:t>
+              <a:t>5 / 12</a:t>
             </a:r>
             <a:endParaRPr lang="en-US" sz="950" dirty="0"/>
           </a:p>
@@ -8277,7 +11869,7 @@
                 <a:ea typeface="Calibri" pitchFamily="34" charset="-122"/>
                 <a:cs typeface="Calibri" pitchFamily="34" charset="-120"/>
               </a:rPr>
-              <a:t>6 / 10</a:t>
+              <a:t>6 / 12</a:t>
             </a:r>
             <a:endParaRPr lang="en-US" sz="950" dirty="0"/>
           </a:p>
@@ -9210,7 +12802,7 @@
                 <a:ea typeface="Calibri" pitchFamily="34" charset="-122"/>
                 <a:cs typeface="Calibri" pitchFamily="34" charset="-120"/>
               </a:rPr>
-              <a:t>7 / 10</a:t>
+              <a:t>7 / 12</a:t>
             </a:r>
             <a:endParaRPr lang="en-US" sz="950" dirty="0"/>
           </a:p>
@@ -10521,7 +14113,7 @@
                 <a:ea typeface="Calibri" pitchFamily="34" charset="-122"/>
                 <a:cs typeface="Calibri" pitchFamily="34" charset="-120"/>
               </a:rPr>
-              <a:t>8 / 10</a:t>
+              <a:t>8 / 12</a:t>
             </a:r>
             <a:endParaRPr lang="en-US" sz="950" dirty="0"/>
           </a:p>
@@ -11860,7 +15452,7 @@
                 <a:ea typeface="Calibri" pitchFamily="34" charset="-122"/>
                 <a:cs typeface="Calibri" pitchFamily="34" charset="-120"/>
               </a:rPr>
-              <a:t>9 / 10</a:t>
+              <a:t>9 / 12</a:t>
             </a:r>
             <a:endParaRPr lang="en-US" sz="950" dirty="0"/>
           </a:p>
